--- a/Seed App.pptx
+++ b/Seed App.pptx
@@ -4,6 +4,9 @@
   <p:sldMasterIdLst>
     <p:sldMasterId id="2147483648" r:id="rId1"/>
   </p:sldMasterIdLst>
+  <p:notesMasterIdLst>
+    <p:notesMasterId r:id="rId38"/>
+  </p:notesMasterIdLst>
   <p:sldIdLst>
     <p:sldId id="256" r:id="rId2"/>
     <p:sldId id="257" r:id="rId3"/>
@@ -27,21 +30,35 @@
     <p:sldId id="275" r:id="rId21"/>
     <p:sldId id="276" r:id="rId22"/>
     <p:sldId id="277" r:id="rId23"/>
+    <p:sldId id="279" r:id="rId24"/>
+    <p:sldId id="280" r:id="rId25"/>
+    <p:sldId id="281" r:id="rId26"/>
+    <p:sldId id="282" r:id="rId27"/>
+    <p:sldId id="283" r:id="rId28"/>
+    <p:sldId id="284" r:id="rId29"/>
+    <p:sldId id="285" r:id="rId30"/>
+    <p:sldId id="286" r:id="rId31"/>
+    <p:sldId id="287" r:id="rId32"/>
+    <p:sldId id="288" r:id="rId33"/>
+    <p:sldId id="289" r:id="rId34"/>
+    <p:sldId id="290" r:id="rId35"/>
+    <p:sldId id="291" r:id="rId36"/>
+    <p:sldId id="292" r:id="rId37"/>
   </p:sldIdLst>
   <p:sldSz cx="18288000" cy="10287000"/>
   <p:notesSz cx="6858000" cy="9144000"/>
   <p:embeddedFontLst>
     <p:embeddedFont>
       <p:font typeface="Canva Sans" panose="020B0604020202020204" charset="0"/>
-      <p:regular r:id="rId24"/>
+      <p:regular r:id="rId39"/>
     </p:embeddedFont>
     <p:embeddedFont>
       <p:font typeface="Canva Sans Bold" panose="020B0604020202020204" charset="0"/>
-      <p:regular r:id="rId25"/>
+      <p:regular r:id="rId40"/>
     </p:embeddedFont>
     <p:embeddedFont>
       <p:font typeface="Canva Sans Bold Italics" panose="020B0604020202020204" charset="0"/>
-      <p:regular r:id="rId26"/>
+      <p:regular r:id="rId41"/>
     </p:embeddedFont>
   </p:embeddedFontLst>
   <p:defaultTextStyle>
@@ -156,6 +173,2978 @@
     </p:ext>
   </p:extLst>
 </p:presentation>
+</file>
+
+<file path=ppt/notesMasters/notesMaster1.xml><?xml version="1.0" encoding="utf-8"?>
+<p:notesMaster xmlns:a="http://schemas.openxmlformats.org/drawingml/2006/main" xmlns:r="http://schemas.openxmlformats.org/officeDocument/2006/relationships" xmlns:p="http://schemas.openxmlformats.org/presentationml/2006/main">
+  <p:cSld>
+    <p:bg>
+      <p:bgRef idx="1001">
+        <a:schemeClr val="bg1"/>
+      </p:bgRef>
+    </p:bg>
+    <p:spTree>
+      <p:nvGrpSpPr>
+        <p:cNvPr id="1" name=""/>
+        <p:cNvGrpSpPr/>
+        <p:nvPr/>
+      </p:nvGrpSpPr>
+      <p:grpSpPr>
+        <a:xfrm>
+          <a:off x="0" y="0"/>
+          <a:ext cx="0" cy="0"/>
+          <a:chOff x="0" y="0"/>
+          <a:chExt cx="0" cy="0"/>
+        </a:xfrm>
+      </p:grpSpPr>
+      <p:sp>
+        <p:nvSpPr>
+          <p:cNvPr id="2" name="Header Placeholder 1"/>
+          <p:cNvSpPr>
+            <a:spLocks noGrp="1"/>
+          </p:cNvSpPr>
+          <p:nvPr>
+            <p:ph type="hdr" sz="quarter"/>
+          </p:nvPr>
+        </p:nvSpPr>
+        <p:spPr>
+          <a:xfrm>
+            <a:off x="0" y="0"/>
+            <a:ext cx="2971800" cy="458788"/>
+          </a:xfrm>
+          <a:prstGeom prst="rect">
+            <a:avLst/>
+          </a:prstGeom>
+        </p:spPr>
+        <p:txBody>
+          <a:bodyPr vert="horz" lIns="91440" tIns="45720" rIns="91440" bIns="45720" rtlCol="0"/>
+          <a:lstStyle>
+            <a:lvl1pPr algn="l">
+              <a:defRPr sz="1200"/>
+            </a:lvl1pPr>
+          </a:lstStyle>
+          <a:p>
+            <a:endParaRPr lang="en-PH"/>
+          </a:p>
+        </p:txBody>
+      </p:sp>
+      <p:sp>
+        <p:nvSpPr>
+          <p:cNvPr id="3" name="Date Placeholder 2"/>
+          <p:cNvSpPr>
+            <a:spLocks noGrp="1"/>
+          </p:cNvSpPr>
+          <p:nvPr>
+            <p:ph type="dt" idx="1"/>
+          </p:nvPr>
+        </p:nvSpPr>
+        <p:spPr>
+          <a:xfrm>
+            <a:off x="3884613" y="0"/>
+            <a:ext cx="2971800" cy="458788"/>
+          </a:xfrm>
+          <a:prstGeom prst="rect">
+            <a:avLst/>
+          </a:prstGeom>
+        </p:spPr>
+        <p:txBody>
+          <a:bodyPr vert="horz" lIns="91440" tIns="45720" rIns="91440" bIns="45720" rtlCol="0"/>
+          <a:lstStyle>
+            <a:lvl1pPr algn="r">
+              <a:defRPr sz="1200"/>
+            </a:lvl1pPr>
+          </a:lstStyle>
+          <a:p>
+            <a:fld id="{9B945EF2-A068-483B-992B-93DA3739C852}" type="datetimeFigureOut">
+              <a:rPr lang="en-PH" smtClean="0"/>
+              <a:t>3/2/2026</a:t>
+            </a:fld>
+            <a:endParaRPr lang="en-PH"/>
+          </a:p>
+        </p:txBody>
+      </p:sp>
+      <p:sp>
+        <p:nvSpPr>
+          <p:cNvPr id="4" name="Slide Image Placeholder 3"/>
+          <p:cNvSpPr>
+            <a:spLocks noGrp="1" noRot="1" noChangeAspect="1"/>
+          </p:cNvSpPr>
+          <p:nvPr>
+            <p:ph type="sldImg" idx="2"/>
+          </p:nvPr>
+        </p:nvSpPr>
+        <p:spPr>
+          <a:xfrm>
+            <a:off x="685800" y="1143000"/>
+            <a:ext cx="5486400" cy="3086100"/>
+          </a:xfrm>
+          <a:prstGeom prst="rect">
+            <a:avLst/>
+          </a:prstGeom>
+          <a:noFill/>
+          <a:ln w="12700">
+            <a:solidFill>
+              <a:prstClr val="black"/>
+            </a:solidFill>
+          </a:ln>
+        </p:spPr>
+        <p:txBody>
+          <a:bodyPr vert="horz" lIns="91440" tIns="45720" rIns="91440" bIns="45720" rtlCol="0" anchor="ctr"/>
+          <a:lstStyle/>
+          <a:p>
+            <a:endParaRPr lang="en-PH"/>
+          </a:p>
+        </p:txBody>
+      </p:sp>
+      <p:sp>
+        <p:nvSpPr>
+          <p:cNvPr id="5" name="Notes Placeholder 4"/>
+          <p:cNvSpPr>
+            <a:spLocks noGrp="1"/>
+          </p:cNvSpPr>
+          <p:nvPr>
+            <p:ph type="body" sz="quarter" idx="3"/>
+          </p:nvPr>
+        </p:nvSpPr>
+        <p:spPr>
+          <a:xfrm>
+            <a:off x="685800" y="4400550"/>
+            <a:ext cx="5486400" cy="3600450"/>
+          </a:xfrm>
+          <a:prstGeom prst="rect">
+            <a:avLst/>
+          </a:prstGeom>
+        </p:spPr>
+        <p:txBody>
+          <a:bodyPr vert="horz" lIns="91440" tIns="45720" rIns="91440" bIns="45720" rtlCol="0"/>
+          <a:lstStyle/>
+          <a:p>
+            <a:pPr lvl="0"/>
+            <a:r>
+              <a:rPr lang="en-US"/>
+              <a:t>Click to edit Master text styles</a:t>
+            </a:r>
+          </a:p>
+          <a:p>
+            <a:pPr lvl="1"/>
+            <a:r>
+              <a:rPr lang="en-US"/>
+              <a:t>Second level</a:t>
+            </a:r>
+          </a:p>
+          <a:p>
+            <a:pPr lvl="2"/>
+            <a:r>
+              <a:rPr lang="en-US"/>
+              <a:t>Third level</a:t>
+            </a:r>
+          </a:p>
+          <a:p>
+            <a:pPr lvl="3"/>
+            <a:r>
+              <a:rPr lang="en-US"/>
+              <a:t>Fourth level</a:t>
+            </a:r>
+          </a:p>
+          <a:p>
+            <a:pPr lvl="4"/>
+            <a:r>
+              <a:rPr lang="en-US"/>
+              <a:t>Fifth level</a:t>
+            </a:r>
+            <a:endParaRPr lang="en-PH"/>
+          </a:p>
+        </p:txBody>
+      </p:sp>
+      <p:sp>
+        <p:nvSpPr>
+          <p:cNvPr id="6" name="Footer Placeholder 5"/>
+          <p:cNvSpPr>
+            <a:spLocks noGrp="1"/>
+          </p:cNvSpPr>
+          <p:nvPr>
+            <p:ph type="ftr" sz="quarter" idx="4"/>
+          </p:nvPr>
+        </p:nvSpPr>
+        <p:spPr>
+          <a:xfrm>
+            <a:off x="0" y="8685213"/>
+            <a:ext cx="2971800" cy="458787"/>
+          </a:xfrm>
+          <a:prstGeom prst="rect">
+            <a:avLst/>
+          </a:prstGeom>
+        </p:spPr>
+        <p:txBody>
+          <a:bodyPr vert="horz" lIns="91440" tIns="45720" rIns="91440" bIns="45720" rtlCol="0" anchor="b"/>
+          <a:lstStyle>
+            <a:lvl1pPr algn="l">
+              <a:defRPr sz="1200"/>
+            </a:lvl1pPr>
+          </a:lstStyle>
+          <a:p>
+            <a:endParaRPr lang="en-PH"/>
+          </a:p>
+        </p:txBody>
+      </p:sp>
+      <p:sp>
+        <p:nvSpPr>
+          <p:cNvPr id="7" name="Slide Number Placeholder 6"/>
+          <p:cNvSpPr>
+            <a:spLocks noGrp="1"/>
+          </p:cNvSpPr>
+          <p:nvPr>
+            <p:ph type="sldNum" sz="quarter" idx="5"/>
+          </p:nvPr>
+        </p:nvSpPr>
+        <p:spPr>
+          <a:xfrm>
+            <a:off x="3884613" y="8685213"/>
+            <a:ext cx="2971800" cy="458787"/>
+          </a:xfrm>
+          <a:prstGeom prst="rect">
+            <a:avLst/>
+          </a:prstGeom>
+        </p:spPr>
+        <p:txBody>
+          <a:bodyPr vert="horz" lIns="91440" tIns="45720" rIns="91440" bIns="45720" rtlCol="0" anchor="b"/>
+          <a:lstStyle>
+            <a:lvl1pPr algn="r">
+              <a:defRPr sz="1200"/>
+            </a:lvl1pPr>
+          </a:lstStyle>
+          <a:p>
+            <a:fld id="{ACDB7A15-2ED2-485D-9FD2-B8844FDCB40D}" type="slidenum">
+              <a:rPr lang="en-PH" smtClean="0"/>
+              <a:t>‹#›</a:t>
+            </a:fld>
+            <a:endParaRPr lang="en-PH"/>
+          </a:p>
+        </p:txBody>
+      </p:sp>
+    </p:spTree>
+    <p:extLst>
+      <p:ext uri="{BB962C8B-B14F-4D97-AF65-F5344CB8AC3E}">
+        <p14:creationId xmlns:p14="http://schemas.microsoft.com/office/powerpoint/2010/main" val="2470519738"/>
+      </p:ext>
+    </p:extLst>
+  </p:cSld>
+  <p:clrMap bg1="lt1" tx1="dk1" bg2="lt2" tx2="dk2" accent1="accent1" accent2="accent2" accent3="accent3" accent4="accent4" accent5="accent5" accent6="accent6" hlink="hlink" folHlink="folHlink"/>
+  <p:notesStyle>
+    <a:lvl1pPr marL="0" algn="l" defTabSz="914400" rtl="0" eaLnBrk="1" latinLnBrk="0" hangingPunct="1">
+      <a:defRPr sz="1200" kern="1200">
+        <a:solidFill>
+          <a:schemeClr val="tx1"/>
+        </a:solidFill>
+        <a:latin typeface="+mn-lt"/>
+        <a:ea typeface="+mn-ea"/>
+        <a:cs typeface="+mn-cs"/>
+      </a:defRPr>
+    </a:lvl1pPr>
+    <a:lvl2pPr marL="457200" algn="l" defTabSz="914400" rtl="0" eaLnBrk="1" latinLnBrk="0" hangingPunct="1">
+      <a:defRPr sz="1200" kern="1200">
+        <a:solidFill>
+          <a:schemeClr val="tx1"/>
+        </a:solidFill>
+        <a:latin typeface="+mn-lt"/>
+        <a:ea typeface="+mn-ea"/>
+        <a:cs typeface="+mn-cs"/>
+      </a:defRPr>
+    </a:lvl2pPr>
+    <a:lvl3pPr marL="914400" algn="l" defTabSz="914400" rtl="0" eaLnBrk="1" latinLnBrk="0" hangingPunct="1">
+      <a:defRPr sz="1200" kern="1200">
+        <a:solidFill>
+          <a:schemeClr val="tx1"/>
+        </a:solidFill>
+        <a:latin typeface="+mn-lt"/>
+        <a:ea typeface="+mn-ea"/>
+        <a:cs typeface="+mn-cs"/>
+      </a:defRPr>
+    </a:lvl3pPr>
+    <a:lvl4pPr marL="1371600" algn="l" defTabSz="914400" rtl="0" eaLnBrk="1" latinLnBrk="0" hangingPunct="1">
+      <a:defRPr sz="1200" kern="1200">
+        <a:solidFill>
+          <a:schemeClr val="tx1"/>
+        </a:solidFill>
+        <a:latin typeface="+mn-lt"/>
+        <a:ea typeface="+mn-ea"/>
+        <a:cs typeface="+mn-cs"/>
+      </a:defRPr>
+    </a:lvl4pPr>
+    <a:lvl5pPr marL="1828800" algn="l" defTabSz="914400" rtl="0" eaLnBrk="1" latinLnBrk="0" hangingPunct="1">
+      <a:defRPr sz="1200" kern="1200">
+        <a:solidFill>
+          <a:schemeClr val="tx1"/>
+        </a:solidFill>
+        <a:latin typeface="+mn-lt"/>
+        <a:ea typeface="+mn-ea"/>
+        <a:cs typeface="+mn-cs"/>
+      </a:defRPr>
+    </a:lvl5pPr>
+    <a:lvl6pPr marL="2286000" algn="l" defTabSz="914400" rtl="0" eaLnBrk="1" latinLnBrk="0" hangingPunct="1">
+      <a:defRPr sz="1200" kern="1200">
+        <a:solidFill>
+          <a:schemeClr val="tx1"/>
+        </a:solidFill>
+        <a:latin typeface="+mn-lt"/>
+        <a:ea typeface="+mn-ea"/>
+        <a:cs typeface="+mn-cs"/>
+      </a:defRPr>
+    </a:lvl6pPr>
+    <a:lvl7pPr marL="2743200" algn="l" defTabSz="914400" rtl="0" eaLnBrk="1" latinLnBrk="0" hangingPunct="1">
+      <a:defRPr sz="1200" kern="1200">
+        <a:solidFill>
+          <a:schemeClr val="tx1"/>
+        </a:solidFill>
+        <a:latin typeface="+mn-lt"/>
+        <a:ea typeface="+mn-ea"/>
+        <a:cs typeface="+mn-cs"/>
+      </a:defRPr>
+    </a:lvl7pPr>
+    <a:lvl8pPr marL="3200400" algn="l" defTabSz="914400" rtl="0" eaLnBrk="1" latinLnBrk="0" hangingPunct="1">
+      <a:defRPr sz="1200" kern="1200">
+        <a:solidFill>
+          <a:schemeClr val="tx1"/>
+        </a:solidFill>
+        <a:latin typeface="+mn-lt"/>
+        <a:ea typeface="+mn-ea"/>
+        <a:cs typeface="+mn-cs"/>
+      </a:defRPr>
+    </a:lvl8pPr>
+    <a:lvl9pPr marL="3657600" algn="l" defTabSz="914400" rtl="0" eaLnBrk="1" latinLnBrk="0" hangingPunct="1">
+      <a:defRPr sz="1200" kern="1200">
+        <a:solidFill>
+          <a:schemeClr val="tx1"/>
+        </a:solidFill>
+        <a:latin typeface="+mn-lt"/>
+        <a:ea typeface="+mn-ea"/>
+        <a:cs typeface="+mn-cs"/>
+      </a:defRPr>
+    </a:lvl9pPr>
+  </p:notesStyle>
+</p:notesMaster>
+</file>
+
+<file path=ppt/notesSlides/notesSlide1.xml><?xml version="1.0" encoding="utf-8"?>
+<p:notes xmlns:a="http://schemas.openxmlformats.org/drawingml/2006/main" xmlns:r="http://schemas.openxmlformats.org/officeDocument/2006/relationships" xmlns:p="http://schemas.openxmlformats.org/presentationml/2006/main">
+  <p:cSld>
+    <p:spTree>
+      <p:nvGrpSpPr>
+        <p:cNvPr id="1" name=""/>
+        <p:cNvGrpSpPr/>
+        <p:nvPr/>
+      </p:nvGrpSpPr>
+      <p:grpSpPr>
+        <a:xfrm>
+          <a:off x="0" y="0"/>
+          <a:ext cx="0" cy="0"/>
+          <a:chOff x="0" y="0"/>
+          <a:chExt cx="0" cy="0"/>
+        </a:xfrm>
+      </p:grpSpPr>
+      <p:sp>
+        <p:nvSpPr>
+          <p:cNvPr id="2" name="Slide Image Placeholder 1"/>
+          <p:cNvSpPr>
+            <a:spLocks noGrp="1" noRot="1" noChangeAspect="1"/>
+          </p:cNvSpPr>
+          <p:nvPr>
+            <p:ph type="sldImg"/>
+          </p:nvPr>
+        </p:nvSpPr>
+        <p:spPr/>
+      </p:sp>
+      <p:sp>
+        <p:nvSpPr>
+          <p:cNvPr id="3" name="Notes Placeholder 2"/>
+          <p:cNvSpPr>
+            <a:spLocks noGrp="1"/>
+          </p:cNvSpPr>
+          <p:nvPr>
+            <p:ph type="body" idx="1"/>
+          </p:nvPr>
+        </p:nvSpPr>
+        <p:spPr/>
+        <p:txBody>
+          <a:bodyPr/>
+          <a:lstStyle/>
+          <a:p>
+            <a:r>
+              <a:rPr lang="en-US" dirty="0"/>
+              <a:t>When the user starts the application, the </a:t>
+            </a:r>
+            <a:r>
+              <a:rPr lang="en-US" sz="1200" kern="1200" dirty="0" err="1">
+                <a:solidFill>
+                  <a:schemeClr val="tx1"/>
+                </a:solidFill>
+                <a:effectLst/>
+                <a:latin typeface="+mn-lt"/>
+                <a:ea typeface="+mn-ea"/>
+                <a:cs typeface="+mn-cs"/>
+              </a:rPr>
+              <a:t>seed_app</a:t>
+            </a:r>
+            <a:r>
+              <a:rPr lang="en-US" dirty="0"/>
+              <a:t> is initialized. This is the entry point of the system. Its job is to set up networking, show the menu, and coordinate downloads. </a:t>
+            </a:r>
+            <a:r>
+              <a:rPr lang="en-US" sz="1200" kern="1200" dirty="0" err="1">
+                <a:solidFill>
+                  <a:schemeClr val="tx1"/>
+                </a:solidFill>
+                <a:effectLst/>
+                <a:latin typeface="+mn-lt"/>
+                <a:ea typeface="+mn-ea"/>
+                <a:cs typeface="+mn-cs"/>
+              </a:rPr>
+              <a:t>seed_app</a:t>
+            </a:r>
+            <a:r>
+              <a:rPr lang="en-US" dirty="0"/>
+              <a:t> calls the </a:t>
+            </a:r>
+            <a:r>
+              <a:rPr lang="en-US" sz="1200" kern="1200" dirty="0" err="1">
+                <a:solidFill>
+                  <a:schemeClr val="tx1"/>
+                </a:solidFill>
+                <a:effectLst/>
+                <a:latin typeface="+mn-lt"/>
+                <a:ea typeface="+mn-ea"/>
+                <a:cs typeface="+mn-cs"/>
+              </a:rPr>
+              <a:t>port_manager</a:t>
+            </a:r>
+            <a:r>
+              <a:rPr lang="en-US" dirty="0"/>
+              <a:t> to reserve a free port (between 9000–9005). This port becomes the peer’s identity in the network.</a:t>
+            </a:r>
+            <a:endParaRPr lang="en-PH" dirty="0"/>
+          </a:p>
+        </p:txBody>
+      </p:sp>
+      <p:sp>
+        <p:nvSpPr>
+          <p:cNvPr id="4" name="Slide Number Placeholder 3"/>
+          <p:cNvSpPr>
+            <a:spLocks noGrp="1"/>
+          </p:cNvSpPr>
+          <p:nvPr>
+            <p:ph type="sldNum" sz="quarter" idx="5"/>
+          </p:nvPr>
+        </p:nvSpPr>
+        <p:spPr/>
+        <p:txBody>
+          <a:bodyPr/>
+          <a:lstStyle/>
+          <a:p>
+            <a:fld id="{ACDB7A15-2ED2-485D-9FD2-B8844FDCB40D}" type="slidenum">
+              <a:rPr lang="en-PH" smtClean="0"/>
+              <a:t>24</a:t>
+            </a:fld>
+            <a:endParaRPr lang="en-PH"/>
+          </a:p>
+        </p:txBody>
+      </p:sp>
+    </p:spTree>
+    <p:extLst>
+      <p:ext uri="{BB962C8B-B14F-4D97-AF65-F5344CB8AC3E}">
+        <p14:creationId xmlns:p14="http://schemas.microsoft.com/office/powerpoint/2010/main" val="1541491378"/>
+      </p:ext>
+    </p:extLst>
+  </p:cSld>
+  <p:clrMapOvr>
+    <a:masterClrMapping/>
+  </p:clrMapOvr>
+</p:notes>
+</file>
+
+<file path=ppt/notesSlides/notesSlide10.xml><?xml version="1.0" encoding="utf-8"?>
+<p:notes xmlns:a="http://schemas.openxmlformats.org/drawingml/2006/main" xmlns:r="http://schemas.openxmlformats.org/officeDocument/2006/relationships" xmlns:p="http://schemas.openxmlformats.org/presentationml/2006/main">
+  <p:cSld>
+    <p:spTree>
+      <p:nvGrpSpPr>
+        <p:cNvPr id="1" name="">
+          <a:extLst>
+            <a:ext uri="{FF2B5EF4-FFF2-40B4-BE49-F238E27FC236}">
+              <a16:creationId xmlns:a16="http://schemas.microsoft.com/office/drawing/2014/main" id="{4B96DB78-C612-0DC7-0962-097B2CF89910}"/>
+            </a:ext>
+          </a:extLst>
+        </p:cNvPr>
+        <p:cNvGrpSpPr/>
+        <p:nvPr/>
+      </p:nvGrpSpPr>
+      <p:grpSpPr>
+        <a:xfrm>
+          <a:off x="0" y="0"/>
+          <a:ext cx="0" cy="0"/>
+          <a:chOff x="0" y="0"/>
+          <a:chExt cx="0" cy="0"/>
+        </a:xfrm>
+      </p:grpSpPr>
+      <p:sp>
+        <p:nvSpPr>
+          <p:cNvPr id="2" name="Slide Image Placeholder 1">
+            <a:extLst>
+              <a:ext uri="{FF2B5EF4-FFF2-40B4-BE49-F238E27FC236}">
+                <a16:creationId xmlns:a16="http://schemas.microsoft.com/office/drawing/2014/main" id="{BD80FBE0-9E31-F888-9CBF-E0181F072677}"/>
+              </a:ext>
+            </a:extLst>
+          </p:cNvPr>
+          <p:cNvSpPr>
+            <a:spLocks noGrp="1" noRot="1" noChangeAspect="1"/>
+          </p:cNvSpPr>
+          <p:nvPr>
+            <p:ph type="sldImg"/>
+          </p:nvPr>
+        </p:nvSpPr>
+        <p:spPr/>
+      </p:sp>
+      <p:sp>
+        <p:nvSpPr>
+          <p:cNvPr id="3" name="Notes Placeholder 2">
+            <a:extLst>
+              <a:ext uri="{FF2B5EF4-FFF2-40B4-BE49-F238E27FC236}">
+                <a16:creationId xmlns:a16="http://schemas.microsoft.com/office/drawing/2014/main" id="{2A287962-B20A-FB70-05DB-7A091C38254B}"/>
+              </a:ext>
+            </a:extLst>
+          </p:cNvPr>
+          <p:cNvSpPr>
+            <a:spLocks noGrp="1"/>
+          </p:cNvSpPr>
+          <p:nvPr>
+            <p:ph type="body" idx="1"/>
+          </p:nvPr>
+        </p:nvSpPr>
+        <p:spPr/>
+        <p:txBody>
+          <a:bodyPr/>
+          <a:lstStyle/>
+          <a:p>
+            <a:r>
+              <a:rPr lang="en-US" dirty="0"/>
+              <a:t>Every chunk request produces a </a:t>
+            </a:r>
+            <a:r>
+              <a:rPr lang="en-US" sz="1200" kern="1200" dirty="0" err="1">
+                <a:solidFill>
+                  <a:schemeClr val="tx1"/>
+                </a:solidFill>
+                <a:effectLst/>
+                <a:latin typeface="+mn-lt"/>
+                <a:ea typeface="+mn-ea"/>
+                <a:cs typeface="+mn-cs"/>
+              </a:rPr>
+              <a:t>ChunkResult</a:t>
+            </a:r>
+            <a:r>
+              <a:rPr lang="en-US" dirty="0"/>
+              <a:t>. It tells us whether the chunk was successfully fetched, how many bytes were received, and if there was an error.</a:t>
+            </a:r>
+          </a:p>
+          <a:p>
+            <a:r>
+              <a:rPr lang="en-US" sz="1200" kern="1200" dirty="0" err="1">
+                <a:solidFill>
+                  <a:schemeClr val="tx1"/>
+                </a:solidFill>
+                <a:effectLst/>
+                <a:latin typeface="+mn-lt"/>
+                <a:ea typeface="+mn-ea"/>
+                <a:cs typeface="+mn-cs"/>
+              </a:rPr>
+              <a:t>ChunkResult.ok</a:t>
+            </a:r>
+            <a:r>
+              <a:rPr lang="en-US" dirty="0">
+                <a:effectLst/>
+              </a:rPr>
+              <a:t> indicates success.</a:t>
+            </a:r>
+          </a:p>
+          <a:p>
+            <a:r>
+              <a:rPr lang="en-US" sz="1200" kern="1200" dirty="0" err="1">
+                <a:solidFill>
+                  <a:schemeClr val="tx1"/>
+                </a:solidFill>
+                <a:effectLst/>
+                <a:latin typeface="+mn-lt"/>
+                <a:ea typeface="+mn-ea"/>
+                <a:cs typeface="+mn-cs"/>
+              </a:rPr>
+              <a:t>ChunkResult.error</a:t>
+            </a:r>
+            <a:r>
+              <a:rPr lang="en-US" dirty="0">
+                <a:effectLst/>
+              </a:rPr>
+              <a:t> explains failures.</a:t>
+            </a:r>
+          </a:p>
+          <a:p>
+            <a:endParaRPr lang="en-PH" dirty="0"/>
+          </a:p>
+        </p:txBody>
+      </p:sp>
+      <p:sp>
+        <p:nvSpPr>
+          <p:cNvPr id="4" name="Slide Number Placeholder 3">
+            <a:extLst>
+              <a:ext uri="{FF2B5EF4-FFF2-40B4-BE49-F238E27FC236}">
+                <a16:creationId xmlns:a16="http://schemas.microsoft.com/office/drawing/2014/main" id="{3DF43DB3-F5B9-FF08-FCC6-C1FE7B07D9A5}"/>
+              </a:ext>
+            </a:extLst>
+          </p:cNvPr>
+          <p:cNvSpPr>
+            <a:spLocks noGrp="1"/>
+          </p:cNvSpPr>
+          <p:nvPr>
+            <p:ph type="sldNum" sz="quarter" idx="5"/>
+          </p:nvPr>
+        </p:nvSpPr>
+        <p:spPr/>
+        <p:txBody>
+          <a:bodyPr/>
+          <a:lstStyle/>
+          <a:p>
+            <a:fld id="{ACDB7A15-2ED2-485D-9FD2-B8844FDCB40D}" type="slidenum">
+              <a:rPr lang="en-PH" smtClean="0"/>
+              <a:t>33</a:t>
+            </a:fld>
+            <a:endParaRPr lang="en-PH"/>
+          </a:p>
+        </p:txBody>
+      </p:sp>
+    </p:spTree>
+    <p:extLst>
+      <p:ext uri="{BB962C8B-B14F-4D97-AF65-F5344CB8AC3E}">
+        <p14:creationId xmlns:p14="http://schemas.microsoft.com/office/powerpoint/2010/main" val="2830708074"/>
+      </p:ext>
+    </p:extLst>
+  </p:cSld>
+  <p:clrMapOvr>
+    <a:masterClrMapping/>
+  </p:clrMapOvr>
+</p:notes>
+</file>
+
+<file path=ppt/notesSlides/notesSlide11.xml><?xml version="1.0" encoding="utf-8"?>
+<p:notes xmlns:a="http://schemas.openxmlformats.org/drawingml/2006/main" xmlns:r="http://schemas.openxmlformats.org/officeDocument/2006/relationships" xmlns:p="http://schemas.openxmlformats.org/presentationml/2006/main">
+  <p:cSld>
+    <p:spTree>
+      <p:nvGrpSpPr>
+        <p:cNvPr id="1" name="">
+          <a:extLst>
+            <a:ext uri="{FF2B5EF4-FFF2-40B4-BE49-F238E27FC236}">
+              <a16:creationId xmlns:a16="http://schemas.microsoft.com/office/drawing/2014/main" id="{658EDC13-6C93-5C05-5563-81AAFE295FEB}"/>
+            </a:ext>
+          </a:extLst>
+        </p:cNvPr>
+        <p:cNvGrpSpPr/>
+        <p:nvPr/>
+      </p:nvGrpSpPr>
+      <p:grpSpPr>
+        <a:xfrm>
+          <a:off x="0" y="0"/>
+          <a:ext cx="0" cy="0"/>
+          <a:chOff x="0" y="0"/>
+          <a:chExt cx="0" cy="0"/>
+        </a:xfrm>
+      </p:grpSpPr>
+      <p:sp>
+        <p:nvSpPr>
+          <p:cNvPr id="2" name="Slide Image Placeholder 1">
+            <a:extLst>
+              <a:ext uri="{FF2B5EF4-FFF2-40B4-BE49-F238E27FC236}">
+                <a16:creationId xmlns:a16="http://schemas.microsoft.com/office/drawing/2014/main" id="{34662277-E727-4932-4643-D1E9645A289A}"/>
+              </a:ext>
+            </a:extLst>
+          </p:cNvPr>
+          <p:cNvSpPr>
+            <a:spLocks noGrp="1" noRot="1" noChangeAspect="1"/>
+          </p:cNvSpPr>
+          <p:nvPr>
+            <p:ph type="sldImg"/>
+          </p:nvPr>
+        </p:nvSpPr>
+        <p:spPr/>
+      </p:sp>
+      <p:sp>
+        <p:nvSpPr>
+          <p:cNvPr id="3" name="Notes Placeholder 2">
+            <a:extLst>
+              <a:ext uri="{FF2B5EF4-FFF2-40B4-BE49-F238E27FC236}">
+                <a16:creationId xmlns:a16="http://schemas.microsoft.com/office/drawing/2014/main" id="{87052F49-C893-01CA-4D6F-ED35B40EC526}"/>
+              </a:ext>
+            </a:extLst>
+          </p:cNvPr>
+          <p:cNvSpPr>
+            <a:spLocks noGrp="1"/>
+          </p:cNvSpPr>
+          <p:nvPr>
+            <p:ph type="body" idx="1"/>
+          </p:nvPr>
+        </p:nvSpPr>
+        <p:spPr/>
+        <p:txBody>
+          <a:bodyPr/>
+          <a:lstStyle/>
+          <a:p>
+            <a:r>
+              <a:rPr lang="en-US" dirty="0"/>
+              <a:t>“If a seeder fails, the worker marks it dead and calls </a:t>
+            </a:r>
+            <a:r>
+              <a:rPr lang="en-US" sz="1200" kern="1200" dirty="0" err="1">
+                <a:solidFill>
+                  <a:schemeClr val="tx1"/>
+                </a:solidFill>
+                <a:effectLst/>
+                <a:latin typeface="+mn-lt"/>
+                <a:ea typeface="+mn-ea"/>
+                <a:cs typeface="+mn-cs"/>
+              </a:rPr>
+              <a:t>refresh_seeders</a:t>
+            </a:r>
+            <a:r>
+              <a:rPr lang="en-US" sz="1200" kern="1200" dirty="0">
+                <a:solidFill>
+                  <a:schemeClr val="tx1"/>
+                </a:solidFill>
+                <a:effectLst/>
+                <a:latin typeface="+mn-lt"/>
+                <a:ea typeface="+mn-ea"/>
+                <a:cs typeface="+mn-cs"/>
+              </a:rPr>
+              <a:t>()</a:t>
+            </a:r>
+            <a:r>
+              <a:rPr lang="en-US" dirty="0"/>
+              <a:t> to try new ones. If no seeders remain, the job stalls. If the file can’t be written, the job fails.</a:t>
+            </a:r>
+          </a:p>
+          <a:p>
+            <a:r>
+              <a:rPr lang="en-US" sz="1200" kern="1200" dirty="0" err="1">
+                <a:solidFill>
+                  <a:schemeClr val="tx1"/>
+                </a:solidFill>
+                <a:effectLst/>
+                <a:latin typeface="+mn-lt"/>
+                <a:ea typeface="+mn-ea"/>
+                <a:cs typeface="+mn-cs"/>
+              </a:rPr>
+              <a:t>download_manager</a:t>
+            </a:r>
+            <a:r>
+              <a:rPr lang="en-US" sz="1200" kern="1200" dirty="0">
+                <a:solidFill>
+                  <a:schemeClr val="tx1"/>
+                </a:solidFill>
+                <a:effectLst/>
+                <a:latin typeface="+mn-lt"/>
+                <a:ea typeface="+mn-ea"/>
+                <a:cs typeface="+mn-cs"/>
+              </a:rPr>
+              <a:t>::tick()</a:t>
+            </a:r>
+            <a:r>
+              <a:rPr lang="en-US" dirty="0"/>
+              <a:t> periodically refreshes seeders.</a:t>
+            </a:r>
+            <a:endParaRPr lang="en-PH" dirty="0"/>
+          </a:p>
+        </p:txBody>
+      </p:sp>
+      <p:sp>
+        <p:nvSpPr>
+          <p:cNvPr id="4" name="Slide Number Placeholder 3">
+            <a:extLst>
+              <a:ext uri="{FF2B5EF4-FFF2-40B4-BE49-F238E27FC236}">
+                <a16:creationId xmlns:a16="http://schemas.microsoft.com/office/drawing/2014/main" id="{82583C89-762A-1E1D-1EC8-F8C4D7FF2733}"/>
+              </a:ext>
+            </a:extLst>
+          </p:cNvPr>
+          <p:cNvSpPr>
+            <a:spLocks noGrp="1"/>
+          </p:cNvSpPr>
+          <p:nvPr>
+            <p:ph type="sldNum" sz="quarter" idx="5"/>
+          </p:nvPr>
+        </p:nvSpPr>
+        <p:spPr/>
+        <p:txBody>
+          <a:bodyPr/>
+          <a:lstStyle/>
+          <a:p>
+            <a:fld id="{ACDB7A15-2ED2-485D-9FD2-B8844FDCB40D}" type="slidenum">
+              <a:rPr lang="en-PH" smtClean="0"/>
+              <a:t>34</a:t>
+            </a:fld>
+            <a:endParaRPr lang="en-PH"/>
+          </a:p>
+        </p:txBody>
+      </p:sp>
+    </p:spTree>
+    <p:extLst>
+      <p:ext uri="{BB962C8B-B14F-4D97-AF65-F5344CB8AC3E}">
+        <p14:creationId xmlns:p14="http://schemas.microsoft.com/office/powerpoint/2010/main" val="1825728482"/>
+      </p:ext>
+    </p:extLst>
+  </p:cSld>
+  <p:clrMapOvr>
+    <a:masterClrMapping/>
+  </p:clrMapOvr>
+</p:notes>
+</file>
+
+<file path=ppt/notesSlides/notesSlide12.xml><?xml version="1.0" encoding="utf-8"?>
+<p:notes xmlns:a="http://schemas.openxmlformats.org/drawingml/2006/main" xmlns:r="http://schemas.openxmlformats.org/officeDocument/2006/relationships" xmlns:p="http://schemas.openxmlformats.org/presentationml/2006/main">
+  <p:cSld>
+    <p:spTree>
+      <p:nvGrpSpPr>
+        <p:cNvPr id="1" name="">
+          <a:extLst>
+            <a:ext uri="{FF2B5EF4-FFF2-40B4-BE49-F238E27FC236}">
+              <a16:creationId xmlns:a16="http://schemas.microsoft.com/office/drawing/2014/main" id="{F59ED546-CB27-ED94-2F58-F5930645DCA8}"/>
+            </a:ext>
+          </a:extLst>
+        </p:cNvPr>
+        <p:cNvGrpSpPr/>
+        <p:nvPr/>
+      </p:nvGrpSpPr>
+      <p:grpSpPr>
+        <a:xfrm>
+          <a:off x="0" y="0"/>
+          <a:ext cx="0" cy="0"/>
+          <a:chOff x="0" y="0"/>
+          <a:chExt cx="0" cy="0"/>
+        </a:xfrm>
+      </p:grpSpPr>
+      <p:sp>
+        <p:nvSpPr>
+          <p:cNvPr id="2" name="Slide Image Placeholder 1">
+            <a:extLst>
+              <a:ext uri="{FF2B5EF4-FFF2-40B4-BE49-F238E27FC236}">
+                <a16:creationId xmlns:a16="http://schemas.microsoft.com/office/drawing/2014/main" id="{81F16C07-1121-3E4B-8755-B6B3574C4283}"/>
+              </a:ext>
+            </a:extLst>
+          </p:cNvPr>
+          <p:cNvSpPr>
+            <a:spLocks noGrp="1" noRot="1" noChangeAspect="1"/>
+          </p:cNvSpPr>
+          <p:nvPr>
+            <p:ph type="sldImg"/>
+          </p:nvPr>
+        </p:nvSpPr>
+        <p:spPr/>
+      </p:sp>
+      <p:sp>
+        <p:nvSpPr>
+          <p:cNvPr id="3" name="Notes Placeholder 2">
+            <a:extLst>
+              <a:ext uri="{FF2B5EF4-FFF2-40B4-BE49-F238E27FC236}">
+                <a16:creationId xmlns:a16="http://schemas.microsoft.com/office/drawing/2014/main" id="{23A07DA8-F83E-C73C-A6F0-421735013226}"/>
+              </a:ext>
+            </a:extLst>
+          </p:cNvPr>
+          <p:cNvSpPr>
+            <a:spLocks noGrp="1"/>
+          </p:cNvSpPr>
+          <p:nvPr>
+            <p:ph type="body" idx="1"/>
+          </p:nvPr>
+        </p:nvSpPr>
+        <p:spPr/>
+        <p:txBody>
+          <a:bodyPr/>
+          <a:lstStyle/>
+          <a:p>
+            <a:r>
+              <a:rPr lang="en-US" dirty="0"/>
+              <a:t>When all chunks are done, the </a:t>
+            </a:r>
+            <a:r>
+              <a:rPr lang="en-US" sz="1200" kern="1200" dirty="0">
+                <a:solidFill>
+                  <a:schemeClr val="tx1"/>
+                </a:solidFill>
+                <a:effectLst/>
+                <a:latin typeface="+mn-lt"/>
+                <a:ea typeface="+mn-ea"/>
+                <a:cs typeface="+mn-cs"/>
+              </a:rPr>
+              <a:t>.part</a:t>
+            </a:r>
+            <a:r>
+              <a:rPr lang="en-US" dirty="0"/>
+              <a:t> file is renamed to the final filename. The job state becomes </a:t>
+            </a:r>
+            <a:r>
+              <a:rPr lang="en-US" b="1" dirty="0">
+                <a:effectLst/>
+              </a:rPr>
+              <a:t>Completed</a:t>
+            </a:r>
+            <a:r>
+              <a:rPr lang="en-US" dirty="0"/>
+              <a:t>. </a:t>
+            </a:r>
+            <a:r>
+              <a:rPr lang="en-US" sz="1200" kern="1200" dirty="0" err="1">
+                <a:solidFill>
+                  <a:schemeClr val="tx1"/>
+                </a:solidFill>
+                <a:effectLst/>
+                <a:latin typeface="+mn-lt"/>
+                <a:ea typeface="+mn-ea"/>
+                <a:cs typeface="+mn-cs"/>
+              </a:rPr>
+              <a:t>WorkerExitGuard</a:t>
+            </a:r>
+            <a:r>
+              <a:rPr lang="en-US" dirty="0"/>
+              <a:t> in </a:t>
+            </a:r>
+            <a:r>
+              <a:rPr lang="en-US" sz="1200" kern="1200" dirty="0" err="1">
+                <a:solidFill>
+                  <a:schemeClr val="tx1"/>
+                </a:solidFill>
+                <a:effectLst/>
+                <a:latin typeface="+mn-lt"/>
+                <a:ea typeface="+mn-ea"/>
+                <a:cs typeface="+mn-cs"/>
+              </a:rPr>
+              <a:t>worker_run</a:t>
+            </a:r>
+            <a:r>
+              <a:rPr lang="en-US" sz="1200" kern="1200" dirty="0">
+                <a:solidFill>
+                  <a:schemeClr val="tx1"/>
+                </a:solidFill>
+                <a:effectLst/>
+                <a:latin typeface="+mn-lt"/>
+                <a:ea typeface="+mn-ea"/>
+                <a:cs typeface="+mn-cs"/>
+              </a:rPr>
+              <a:t>()</a:t>
+            </a:r>
+            <a:r>
+              <a:rPr lang="en-US" dirty="0"/>
+              <a:t> handles the final rename and marks the job completed. “At any time, the user can check download status. The manager prints progress, seeder ports, and state.” </a:t>
+            </a:r>
+            <a:r>
+              <a:rPr lang="en-US" sz="1200" kern="1200" dirty="0" err="1">
+                <a:solidFill>
+                  <a:schemeClr val="tx1"/>
+                </a:solidFill>
+                <a:effectLst/>
+                <a:latin typeface="+mn-lt"/>
+                <a:ea typeface="+mn-ea"/>
+                <a:cs typeface="+mn-cs"/>
+              </a:rPr>
+              <a:t>download_manager</a:t>
+            </a:r>
+            <a:r>
+              <a:rPr lang="en-US" sz="1200" kern="1200" dirty="0">
+                <a:solidFill>
+                  <a:schemeClr val="tx1"/>
+                </a:solidFill>
+                <a:effectLst/>
+                <a:latin typeface="+mn-lt"/>
+                <a:ea typeface="+mn-ea"/>
+                <a:cs typeface="+mn-cs"/>
+              </a:rPr>
+              <a:t>::</a:t>
+            </a:r>
+            <a:r>
+              <a:rPr lang="en-US" sz="1200" kern="1200" dirty="0" err="1">
+                <a:solidFill>
+                  <a:schemeClr val="tx1"/>
+                </a:solidFill>
+                <a:effectLst/>
+                <a:latin typeface="+mn-lt"/>
+                <a:ea typeface="+mn-ea"/>
+                <a:cs typeface="+mn-cs"/>
+              </a:rPr>
+              <a:t>get_status_string</a:t>
+            </a:r>
+            <a:r>
+              <a:rPr lang="en-US" sz="1200" kern="1200" dirty="0">
+                <a:solidFill>
+                  <a:schemeClr val="tx1"/>
+                </a:solidFill>
+                <a:effectLst/>
+                <a:latin typeface="+mn-lt"/>
+                <a:ea typeface="+mn-ea"/>
+                <a:cs typeface="+mn-cs"/>
+              </a:rPr>
+              <a:t>()</a:t>
+            </a:r>
+            <a:r>
+              <a:rPr lang="en-US" dirty="0"/>
+              <a:t> builds the status line.</a:t>
+            </a:r>
+            <a:endParaRPr lang="en-PH" dirty="0"/>
+          </a:p>
+        </p:txBody>
+      </p:sp>
+      <p:sp>
+        <p:nvSpPr>
+          <p:cNvPr id="4" name="Slide Number Placeholder 3">
+            <a:extLst>
+              <a:ext uri="{FF2B5EF4-FFF2-40B4-BE49-F238E27FC236}">
+                <a16:creationId xmlns:a16="http://schemas.microsoft.com/office/drawing/2014/main" id="{251CD278-7699-672B-147B-8D02123DEBA8}"/>
+              </a:ext>
+            </a:extLst>
+          </p:cNvPr>
+          <p:cNvSpPr>
+            <a:spLocks noGrp="1"/>
+          </p:cNvSpPr>
+          <p:nvPr>
+            <p:ph type="sldNum" sz="quarter" idx="5"/>
+          </p:nvPr>
+        </p:nvSpPr>
+        <p:spPr/>
+        <p:txBody>
+          <a:bodyPr/>
+          <a:lstStyle/>
+          <a:p>
+            <a:fld id="{ACDB7A15-2ED2-485D-9FD2-B8844FDCB40D}" type="slidenum">
+              <a:rPr lang="en-PH" smtClean="0"/>
+              <a:t>35</a:t>
+            </a:fld>
+            <a:endParaRPr lang="en-PH"/>
+          </a:p>
+        </p:txBody>
+      </p:sp>
+    </p:spTree>
+    <p:extLst>
+      <p:ext uri="{BB962C8B-B14F-4D97-AF65-F5344CB8AC3E}">
+        <p14:creationId xmlns:p14="http://schemas.microsoft.com/office/powerpoint/2010/main" val="3448013559"/>
+      </p:ext>
+    </p:extLst>
+  </p:cSld>
+  <p:clrMapOvr>
+    <a:masterClrMapping/>
+  </p:clrMapOvr>
+</p:notes>
+</file>
+
+<file path=ppt/notesSlides/notesSlide13.xml><?xml version="1.0" encoding="utf-8"?>
+<p:notes xmlns:a="http://schemas.openxmlformats.org/drawingml/2006/main" xmlns:r="http://schemas.openxmlformats.org/officeDocument/2006/relationships" xmlns:p="http://schemas.openxmlformats.org/presentationml/2006/main">
+  <p:cSld>
+    <p:spTree>
+      <p:nvGrpSpPr>
+        <p:cNvPr id="1" name="">
+          <a:extLst>
+            <a:ext uri="{FF2B5EF4-FFF2-40B4-BE49-F238E27FC236}">
+              <a16:creationId xmlns:a16="http://schemas.microsoft.com/office/drawing/2014/main" id="{99173D82-7416-EB36-3A73-A123A08C5BD3}"/>
+            </a:ext>
+          </a:extLst>
+        </p:cNvPr>
+        <p:cNvGrpSpPr/>
+        <p:nvPr/>
+      </p:nvGrpSpPr>
+      <p:grpSpPr>
+        <a:xfrm>
+          <a:off x="0" y="0"/>
+          <a:ext cx="0" cy="0"/>
+          <a:chOff x="0" y="0"/>
+          <a:chExt cx="0" cy="0"/>
+        </a:xfrm>
+      </p:grpSpPr>
+      <p:sp>
+        <p:nvSpPr>
+          <p:cNvPr id="2" name="Slide Image Placeholder 1">
+            <a:extLst>
+              <a:ext uri="{FF2B5EF4-FFF2-40B4-BE49-F238E27FC236}">
+                <a16:creationId xmlns:a16="http://schemas.microsoft.com/office/drawing/2014/main" id="{369C9423-18C3-048C-3A32-C981D6C7CA67}"/>
+              </a:ext>
+            </a:extLst>
+          </p:cNvPr>
+          <p:cNvSpPr>
+            <a:spLocks noGrp="1" noRot="1" noChangeAspect="1"/>
+          </p:cNvSpPr>
+          <p:nvPr>
+            <p:ph type="sldImg"/>
+          </p:nvPr>
+        </p:nvSpPr>
+        <p:spPr/>
+      </p:sp>
+      <p:sp>
+        <p:nvSpPr>
+          <p:cNvPr id="3" name="Notes Placeholder 2">
+            <a:extLst>
+              <a:ext uri="{FF2B5EF4-FFF2-40B4-BE49-F238E27FC236}">
+                <a16:creationId xmlns:a16="http://schemas.microsoft.com/office/drawing/2014/main" id="{2A719592-587A-FAB8-F68B-9E92E7B04032}"/>
+              </a:ext>
+            </a:extLst>
+          </p:cNvPr>
+          <p:cNvSpPr>
+            <a:spLocks noGrp="1"/>
+          </p:cNvSpPr>
+          <p:nvPr>
+            <p:ph type="body" idx="1"/>
+          </p:nvPr>
+        </p:nvSpPr>
+        <p:spPr/>
+        <p:txBody>
+          <a:bodyPr/>
+          <a:lstStyle/>
+          <a:p>
+            <a:r>
+              <a:rPr lang="en-US" dirty="0"/>
+              <a:t>When all chunks are done, the </a:t>
+            </a:r>
+            <a:r>
+              <a:rPr lang="en-US" sz="1200" kern="1200" dirty="0">
+                <a:solidFill>
+                  <a:schemeClr val="tx1"/>
+                </a:solidFill>
+                <a:effectLst/>
+                <a:latin typeface="+mn-lt"/>
+                <a:ea typeface="+mn-ea"/>
+                <a:cs typeface="+mn-cs"/>
+              </a:rPr>
+              <a:t>.part</a:t>
+            </a:r>
+            <a:r>
+              <a:rPr lang="en-US" dirty="0"/>
+              <a:t> file is renamed to the final filename. The job state becomes </a:t>
+            </a:r>
+            <a:r>
+              <a:rPr lang="en-US" b="1" dirty="0">
+                <a:effectLst/>
+              </a:rPr>
+              <a:t>Completed</a:t>
+            </a:r>
+            <a:r>
+              <a:rPr lang="en-US" dirty="0"/>
+              <a:t>. </a:t>
+            </a:r>
+            <a:r>
+              <a:rPr lang="en-US" sz="1200" kern="1200" dirty="0" err="1">
+                <a:solidFill>
+                  <a:schemeClr val="tx1"/>
+                </a:solidFill>
+                <a:effectLst/>
+                <a:latin typeface="+mn-lt"/>
+                <a:ea typeface="+mn-ea"/>
+                <a:cs typeface="+mn-cs"/>
+              </a:rPr>
+              <a:t>WorkerExitGuard</a:t>
+            </a:r>
+            <a:r>
+              <a:rPr lang="en-US" dirty="0"/>
+              <a:t> in </a:t>
+            </a:r>
+            <a:r>
+              <a:rPr lang="en-US" sz="1200" kern="1200" dirty="0" err="1">
+                <a:solidFill>
+                  <a:schemeClr val="tx1"/>
+                </a:solidFill>
+                <a:effectLst/>
+                <a:latin typeface="+mn-lt"/>
+                <a:ea typeface="+mn-ea"/>
+                <a:cs typeface="+mn-cs"/>
+              </a:rPr>
+              <a:t>worker_run</a:t>
+            </a:r>
+            <a:r>
+              <a:rPr lang="en-US" sz="1200" kern="1200" dirty="0">
+                <a:solidFill>
+                  <a:schemeClr val="tx1"/>
+                </a:solidFill>
+                <a:effectLst/>
+                <a:latin typeface="+mn-lt"/>
+                <a:ea typeface="+mn-ea"/>
+                <a:cs typeface="+mn-cs"/>
+              </a:rPr>
+              <a:t>()</a:t>
+            </a:r>
+            <a:r>
+              <a:rPr lang="en-US" dirty="0"/>
+              <a:t> handles the final rename and marks the job completed. “At any time, the user can check download status. The manager prints progress, seeder ports, and state.” </a:t>
+            </a:r>
+            <a:r>
+              <a:rPr lang="en-US" sz="1200" kern="1200" dirty="0" err="1">
+                <a:solidFill>
+                  <a:schemeClr val="tx1"/>
+                </a:solidFill>
+                <a:effectLst/>
+                <a:latin typeface="+mn-lt"/>
+                <a:ea typeface="+mn-ea"/>
+                <a:cs typeface="+mn-cs"/>
+              </a:rPr>
+              <a:t>download_manager</a:t>
+            </a:r>
+            <a:r>
+              <a:rPr lang="en-US" sz="1200" kern="1200" dirty="0">
+                <a:solidFill>
+                  <a:schemeClr val="tx1"/>
+                </a:solidFill>
+                <a:effectLst/>
+                <a:latin typeface="+mn-lt"/>
+                <a:ea typeface="+mn-ea"/>
+                <a:cs typeface="+mn-cs"/>
+              </a:rPr>
+              <a:t>::</a:t>
+            </a:r>
+            <a:r>
+              <a:rPr lang="en-US" sz="1200" kern="1200" dirty="0" err="1">
+                <a:solidFill>
+                  <a:schemeClr val="tx1"/>
+                </a:solidFill>
+                <a:effectLst/>
+                <a:latin typeface="+mn-lt"/>
+                <a:ea typeface="+mn-ea"/>
+                <a:cs typeface="+mn-cs"/>
+              </a:rPr>
+              <a:t>get_status_string</a:t>
+            </a:r>
+            <a:r>
+              <a:rPr lang="en-US" sz="1200" kern="1200" dirty="0">
+                <a:solidFill>
+                  <a:schemeClr val="tx1"/>
+                </a:solidFill>
+                <a:effectLst/>
+                <a:latin typeface="+mn-lt"/>
+                <a:ea typeface="+mn-ea"/>
+                <a:cs typeface="+mn-cs"/>
+              </a:rPr>
+              <a:t>()</a:t>
+            </a:r>
+            <a:r>
+              <a:rPr lang="en-US" dirty="0"/>
+              <a:t> builds the status line.</a:t>
+            </a:r>
+            <a:endParaRPr lang="en-PH" dirty="0"/>
+          </a:p>
+        </p:txBody>
+      </p:sp>
+      <p:sp>
+        <p:nvSpPr>
+          <p:cNvPr id="4" name="Slide Number Placeholder 3">
+            <a:extLst>
+              <a:ext uri="{FF2B5EF4-FFF2-40B4-BE49-F238E27FC236}">
+                <a16:creationId xmlns:a16="http://schemas.microsoft.com/office/drawing/2014/main" id="{6E505737-4A25-8C8D-34ED-A1C92558677D}"/>
+              </a:ext>
+            </a:extLst>
+          </p:cNvPr>
+          <p:cNvSpPr>
+            <a:spLocks noGrp="1"/>
+          </p:cNvSpPr>
+          <p:nvPr>
+            <p:ph type="sldNum" sz="quarter" idx="5"/>
+          </p:nvPr>
+        </p:nvSpPr>
+        <p:spPr/>
+        <p:txBody>
+          <a:bodyPr/>
+          <a:lstStyle/>
+          <a:p>
+            <a:fld id="{ACDB7A15-2ED2-485D-9FD2-B8844FDCB40D}" type="slidenum">
+              <a:rPr lang="en-PH" smtClean="0"/>
+              <a:t>36</a:t>
+            </a:fld>
+            <a:endParaRPr lang="en-PH"/>
+          </a:p>
+        </p:txBody>
+      </p:sp>
+    </p:spTree>
+    <p:extLst>
+      <p:ext uri="{BB962C8B-B14F-4D97-AF65-F5344CB8AC3E}">
+        <p14:creationId xmlns:p14="http://schemas.microsoft.com/office/powerpoint/2010/main" val="419172323"/>
+      </p:ext>
+    </p:extLst>
+  </p:cSld>
+  <p:clrMapOvr>
+    <a:masterClrMapping/>
+  </p:clrMapOvr>
+</p:notes>
+</file>
+
+<file path=ppt/notesSlides/notesSlide2.xml><?xml version="1.0" encoding="utf-8"?>
+<p:notes xmlns:a="http://schemas.openxmlformats.org/drawingml/2006/main" xmlns:r="http://schemas.openxmlformats.org/officeDocument/2006/relationships" xmlns:p="http://schemas.openxmlformats.org/presentationml/2006/main">
+  <p:cSld>
+    <p:spTree>
+      <p:nvGrpSpPr>
+        <p:cNvPr id="1" name="">
+          <a:extLst>
+            <a:ext uri="{FF2B5EF4-FFF2-40B4-BE49-F238E27FC236}">
+              <a16:creationId xmlns:a16="http://schemas.microsoft.com/office/drawing/2014/main" id="{39B3AFDB-F5BE-D2B6-1D04-3A7E2133EB8D}"/>
+            </a:ext>
+          </a:extLst>
+        </p:cNvPr>
+        <p:cNvGrpSpPr/>
+        <p:nvPr/>
+      </p:nvGrpSpPr>
+      <p:grpSpPr>
+        <a:xfrm>
+          <a:off x="0" y="0"/>
+          <a:ext cx="0" cy="0"/>
+          <a:chOff x="0" y="0"/>
+          <a:chExt cx="0" cy="0"/>
+        </a:xfrm>
+      </p:grpSpPr>
+      <p:sp>
+        <p:nvSpPr>
+          <p:cNvPr id="2" name="Slide Image Placeholder 1">
+            <a:extLst>
+              <a:ext uri="{FF2B5EF4-FFF2-40B4-BE49-F238E27FC236}">
+                <a16:creationId xmlns:a16="http://schemas.microsoft.com/office/drawing/2014/main" id="{9C2E93A0-C33B-9926-6166-1B2573FC3675}"/>
+              </a:ext>
+            </a:extLst>
+          </p:cNvPr>
+          <p:cNvSpPr>
+            <a:spLocks noGrp="1" noRot="1" noChangeAspect="1"/>
+          </p:cNvSpPr>
+          <p:nvPr>
+            <p:ph type="sldImg"/>
+          </p:nvPr>
+        </p:nvSpPr>
+        <p:spPr/>
+      </p:sp>
+      <p:sp>
+        <p:nvSpPr>
+          <p:cNvPr id="3" name="Notes Placeholder 2">
+            <a:extLst>
+              <a:ext uri="{FF2B5EF4-FFF2-40B4-BE49-F238E27FC236}">
+                <a16:creationId xmlns:a16="http://schemas.microsoft.com/office/drawing/2014/main" id="{86C3EA18-F079-89F3-C5A0-7F9047651B77}"/>
+              </a:ext>
+            </a:extLst>
+          </p:cNvPr>
+          <p:cNvSpPr>
+            <a:spLocks noGrp="1"/>
+          </p:cNvSpPr>
+          <p:nvPr>
+            <p:ph type="body" idx="1"/>
+          </p:nvPr>
+        </p:nvSpPr>
+        <p:spPr/>
+        <p:txBody>
+          <a:bodyPr/>
+          <a:lstStyle/>
+          <a:p>
+            <a:r>
+              <a:rPr lang="en-US" dirty="0"/>
+              <a:t>The </a:t>
+            </a:r>
+            <a:r>
+              <a:rPr lang="en-US" sz="1200" kern="1200" dirty="0" err="1">
+                <a:solidFill>
+                  <a:schemeClr val="tx1"/>
+                </a:solidFill>
+                <a:effectLst/>
+                <a:latin typeface="+mn-lt"/>
+                <a:ea typeface="+mn-ea"/>
+                <a:cs typeface="+mn-cs"/>
+              </a:rPr>
+              <a:t>port_manager</a:t>
+            </a:r>
+            <a:r>
+              <a:rPr lang="en-US" dirty="0"/>
+              <a:t> keeps track of which ports are available, reserved, or released. It ensures no two peers collide on the same port.</a:t>
+            </a:r>
+          </a:p>
+          <a:p>
+            <a:r>
+              <a:rPr lang="en-US" sz="1200" kern="1200" dirty="0" err="1">
+                <a:solidFill>
+                  <a:schemeClr val="tx1"/>
+                </a:solidFill>
+                <a:effectLst/>
+                <a:latin typeface="+mn-lt"/>
+                <a:ea typeface="+mn-ea"/>
+                <a:cs typeface="+mn-cs"/>
+              </a:rPr>
+              <a:t>reserve_port</a:t>
+            </a:r>
+            <a:r>
+              <a:rPr lang="en-US" sz="1200" kern="1200" dirty="0">
+                <a:solidFill>
+                  <a:schemeClr val="tx1"/>
+                </a:solidFill>
+                <a:effectLst/>
+                <a:latin typeface="+mn-lt"/>
+                <a:ea typeface="+mn-ea"/>
+                <a:cs typeface="+mn-cs"/>
+              </a:rPr>
+              <a:t>()</a:t>
+            </a:r>
+            <a:r>
+              <a:rPr lang="en-US" dirty="0"/>
+              <a:t> binds a socket to a port. </a:t>
+            </a:r>
+            <a:r>
+              <a:rPr lang="en-US" sz="1200" kern="1200" dirty="0" err="1">
+                <a:solidFill>
+                  <a:schemeClr val="tx1"/>
+                </a:solidFill>
+                <a:effectLst/>
+                <a:latin typeface="+mn-lt"/>
+                <a:ea typeface="+mn-ea"/>
+                <a:cs typeface="+mn-cs"/>
+              </a:rPr>
+              <a:t>release_port</a:t>
+            </a:r>
+            <a:r>
+              <a:rPr lang="en-US" sz="1200" kern="1200" dirty="0">
+                <a:solidFill>
+                  <a:schemeClr val="tx1"/>
+                </a:solidFill>
+                <a:effectLst/>
+                <a:latin typeface="+mn-lt"/>
+                <a:ea typeface="+mn-ea"/>
+                <a:cs typeface="+mn-cs"/>
+              </a:rPr>
+              <a:t>()</a:t>
+            </a:r>
+            <a:r>
+              <a:rPr lang="en-US" dirty="0"/>
+              <a:t> frees it when the app exits.</a:t>
+            </a:r>
+            <a:endParaRPr lang="en-PH" dirty="0"/>
+          </a:p>
+        </p:txBody>
+      </p:sp>
+      <p:sp>
+        <p:nvSpPr>
+          <p:cNvPr id="4" name="Slide Number Placeholder 3">
+            <a:extLst>
+              <a:ext uri="{FF2B5EF4-FFF2-40B4-BE49-F238E27FC236}">
+                <a16:creationId xmlns:a16="http://schemas.microsoft.com/office/drawing/2014/main" id="{D6719B3B-8E93-CED8-0366-CC0A4A21C7B9}"/>
+              </a:ext>
+            </a:extLst>
+          </p:cNvPr>
+          <p:cNvSpPr>
+            <a:spLocks noGrp="1"/>
+          </p:cNvSpPr>
+          <p:nvPr>
+            <p:ph type="sldNum" sz="quarter" idx="5"/>
+          </p:nvPr>
+        </p:nvSpPr>
+        <p:spPr/>
+        <p:txBody>
+          <a:bodyPr/>
+          <a:lstStyle/>
+          <a:p>
+            <a:fld id="{ACDB7A15-2ED2-485D-9FD2-B8844FDCB40D}" type="slidenum">
+              <a:rPr lang="en-PH" smtClean="0"/>
+              <a:t>25</a:t>
+            </a:fld>
+            <a:endParaRPr lang="en-PH"/>
+          </a:p>
+        </p:txBody>
+      </p:sp>
+    </p:spTree>
+    <p:extLst>
+      <p:ext uri="{BB962C8B-B14F-4D97-AF65-F5344CB8AC3E}">
+        <p14:creationId xmlns:p14="http://schemas.microsoft.com/office/powerpoint/2010/main" val="4124431362"/>
+      </p:ext>
+    </p:extLst>
+  </p:cSld>
+  <p:clrMapOvr>
+    <a:masterClrMapping/>
+  </p:clrMapOvr>
+</p:notes>
+</file>
+
+<file path=ppt/notesSlides/notesSlide3.xml><?xml version="1.0" encoding="utf-8"?>
+<p:notes xmlns:a="http://schemas.openxmlformats.org/drawingml/2006/main" xmlns:r="http://schemas.openxmlformats.org/officeDocument/2006/relationships" xmlns:p="http://schemas.openxmlformats.org/presentationml/2006/main">
+  <p:cSld>
+    <p:spTree>
+      <p:nvGrpSpPr>
+        <p:cNvPr id="1" name="">
+          <a:extLst>
+            <a:ext uri="{FF2B5EF4-FFF2-40B4-BE49-F238E27FC236}">
+              <a16:creationId xmlns:a16="http://schemas.microsoft.com/office/drawing/2014/main" id="{CE2D0FA9-CB0C-02CC-021E-A4F05B600963}"/>
+            </a:ext>
+          </a:extLst>
+        </p:cNvPr>
+        <p:cNvGrpSpPr/>
+        <p:nvPr/>
+      </p:nvGrpSpPr>
+      <p:grpSpPr>
+        <a:xfrm>
+          <a:off x="0" y="0"/>
+          <a:ext cx="0" cy="0"/>
+          <a:chOff x="0" y="0"/>
+          <a:chExt cx="0" cy="0"/>
+        </a:xfrm>
+      </p:grpSpPr>
+      <p:sp>
+        <p:nvSpPr>
+          <p:cNvPr id="2" name="Slide Image Placeholder 1">
+            <a:extLst>
+              <a:ext uri="{FF2B5EF4-FFF2-40B4-BE49-F238E27FC236}">
+                <a16:creationId xmlns:a16="http://schemas.microsoft.com/office/drawing/2014/main" id="{B9BF9C82-B66C-B7A6-6D55-831BFF414D91}"/>
+              </a:ext>
+            </a:extLst>
+          </p:cNvPr>
+          <p:cNvSpPr>
+            <a:spLocks noGrp="1" noRot="1" noChangeAspect="1"/>
+          </p:cNvSpPr>
+          <p:nvPr>
+            <p:ph type="sldImg"/>
+          </p:nvPr>
+        </p:nvSpPr>
+        <p:spPr/>
+      </p:sp>
+      <p:sp>
+        <p:nvSpPr>
+          <p:cNvPr id="3" name="Notes Placeholder 2">
+            <a:extLst>
+              <a:ext uri="{FF2B5EF4-FFF2-40B4-BE49-F238E27FC236}">
+                <a16:creationId xmlns:a16="http://schemas.microsoft.com/office/drawing/2014/main" id="{74118568-4D46-1694-0E16-C5D16AAA09DA}"/>
+              </a:ext>
+            </a:extLst>
+          </p:cNvPr>
+          <p:cNvSpPr>
+            <a:spLocks noGrp="1"/>
+          </p:cNvSpPr>
+          <p:nvPr>
+            <p:ph type="body" idx="1"/>
+          </p:nvPr>
+        </p:nvSpPr>
+        <p:spPr/>
+        <p:txBody>
+          <a:bodyPr/>
+          <a:lstStyle/>
+          <a:p>
+            <a:r>
+              <a:rPr lang="en-US" dirty="0"/>
+              <a:t>“Once a port is reserved, the app spins up a </a:t>
+            </a:r>
+            <a:r>
+              <a:rPr lang="en-US" sz="1200" kern="1200" dirty="0">
+                <a:solidFill>
+                  <a:schemeClr val="tx1"/>
+                </a:solidFill>
+                <a:effectLst/>
+                <a:latin typeface="+mn-lt"/>
+                <a:ea typeface="+mn-ea"/>
+                <a:cs typeface="+mn-cs"/>
+              </a:rPr>
+              <a:t>Host</a:t>
+            </a:r>
+            <a:r>
+              <a:rPr lang="en-US" dirty="0"/>
+              <a:t> server. This is the server side of the peer. It listens for incoming connections and serves chunks to other peers.</a:t>
+            </a:r>
+            <a:endParaRPr lang="en-PH" dirty="0"/>
+          </a:p>
+        </p:txBody>
+      </p:sp>
+      <p:sp>
+        <p:nvSpPr>
+          <p:cNvPr id="4" name="Slide Number Placeholder 3">
+            <a:extLst>
+              <a:ext uri="{FF2B5EF4-FFF2-40B4-BE49-F238E27FC236}">
+                <a16:creationId xmlns:a16="http://schemas.microsoft.com/office/drawing/2014/main" id="{9332C457-A662-4442-D5BC-FE2DD038291F}"/>
+              </a:ext>
+            </a:extLst>
+          </p:cNvPr>
+          <p:cNvSpPr>
+            <a:spLocks noGrp="1"/>
+          </p:cNvSpPr>
+          <p:nvPr>
+            <p:ph type="sldNum" sz="quarter" idx="5"/>
+          </p:nvPr>
+        </p:nvSpPr>
+        <p:spPr/>
+        <p:txBody>
+          <a:bodyPr/>
+          <a:lstStyle/>
+          <a:p>
+            <a:fld id="{ACDB7A15-2ED2-485D-9FD2-B8844FDCB40D}" type="slidenum">
+              <a:rPr lang="en-PH" smtClean="0"/>
+              <a:t>26</a:t>
+            </a:fld>
+            <a:endParaRPr lang="en-PH"/>
+          </a:p>
+        </p:txBody>
+      </p:sp>
+    </p:spTree>
+    <p:extLst>
+      <p:ext uri="{BB962C8B-B14F-4D97-AF65-F5344CB8AC3E}">
+        <p14:creationId xmlns:p14="http://schemas.microsoft.com/office/powerpoint/2010/main" val="572649293"/>
+      </p:ext>
+    </p:extLst>
+  </p:cSld>
+  <p:clrMapOvr>
+    <a:masterClrMapping/>
+  </p:clrMapOvr>
+</p:notes>
+</file>
+
+<file path=ppt/notesSlides/notesSlide4.xml><?xml version="1.0" encoding="utf-8"?>
+<p:notes xmlns:a="http://schemas.openxmlformats.org/drawingml/2006/main" xmlns:r="http://schemas.openxmlformats.org/officeDocument/2006/relationships" xmlns:p="http://schemas.openxmlformats.org/presentationml/2006/main">
+  <p:cSld>
+    <p:spTree>
+      <p:nvGrpSpPr>
+        <p:cNvPr id="1" name="">
+          <a:extLst>
+            <a:ext uri="{FF2B5EF4-FFF2-40B4-BE49-F238E27FC236}">
+              <a16:creationId xmlns:a16="http://schemas.microsoft.com/office/drawing/2014/main" id="{B11A356D-3AC0-9A9E-0D4A-0857771FEB02}"/>
+            </a:ext>
+          </a:extLst>
+        </p:cNvPr>
+        <p:cNvGrpSpPr/>
+        <p:nvPr/>
+      </p:nvGrpSpPr>
+      <p:grpSpPr>
+        <a:xfrm>
+          <a:off x="0" y="0"/>
+          <a:ext cx="0" cy="0"/>
+          <a:chOff x="0" y="0"/>
+          <a:chExt cx="0" cy="0"/>
+        </a:xfrm>
+      </p:grpSpPr>
+      <p:sp>
+        <p:nvSpPr>
+          <p:cNvPr id="2" name="Slide Image Placeholder 1">
+            <a:extLst>
+              <a:ext uri="{FF2B5EF4-FFF2-40B4-BE49-F238E27FC236}">
+                <a16:creationId xmlns:a16="http://schemas.microsoft.com/office/drawing/2014/main" id="{70D04A60-06EE-52F2-8453-A5AC077B9260}"/>
+              </a:ext>
+            </a:extLst>
+          </p:cNvPr>
+          <p:cNvSpPr>
+            <a:spLocks noGrp="1" noRot="1" noChangeAspect="1"/>
+          </p:cNvSpPr>
+          <p:nvPr>
+            <p:ph type="sldImg"/>
+          </p:nvPr>
+        </p:nvSpPr>
+        <p:spPr/>
+      </p:sp>
+      <p:sp>
+        <p:nvSpPr>
+          <p:cNvPr id="3" name="Notes Placeholder 2">
+            <a:extLst>
+              <a:ext uri="{FF2B5EF4-FFF2-40B4-BE49-F238E27FC236}">
+                <a16:creationId xmlns:a16="http://schemas.microsoft.com/office/drawing/2014/main" id="{151B1D5D-2804-24FE-9089-084B841FE6ED}"/>
+              </a:ext>
+            </a:extLst>
+          </p:cNvPr>
+          <p:cNvSpPr>
+            <a:spLocks noGrp="1"/>
+          </p:cNvSpPr>
+          <p:nvPr>
+            <p:ph type="body" idx="1"/>
+          </p:nvPr>
+        </p:nvSpPr>
+        <p:spPr/>
+        <p:txBody>
+          <a:bodyPr/>
+          <a:lstStyle/>
+          <a:p>
+            <a:r>
+              <a:rPr lang="en-US" dirty="0"/>
+              <a:t>“The user sees a menu with options: download a file, check status, or exit. Choosing download triggers peer discovery.</a:t>
+            </a:r>
+          </a:p>
+          <a:p>
+            <a:r>
+              <a:rPr lang="en-US" sz="1200" kern="1200" dirty="0" err="1">
+                <a:solidFill>
+                  <a:schemeClr val="tx1"/>
+                </a:solidFill>
+                <a:effectLst/>
+                <a:latin typeface="+mn-lt"/>
+                <a:ea typeface="+mn-ea"/>
+                <a:cs typeface="+mn-cs"/>
+              </a:rPr>
+              <a:t>seed_app</a:t>
+            </a:r>
+            <a:r>
+              <a:rPr lang="en-US" sz="1200" kern="1200" dirty="0">
+                <a:solidFill>
+                  <a:schemeClr val="tx1"/>
+                </a:solidFill>
+                <a:effectLst/>
+                <a:latin typeface="+mn-lt"/>
+                <a:ea typeface="+mn-ea"/>
+                <a:cs typeface="+mn-cs"/>
+              </a:rPr>
+              <a:t>::</a:t>
+            </a:r>
+            <a:r>
+              <a:rPr lang="en-US" sz="1200" kern="1200" dirty="0" err="1">
+                <a:solidFill>
+                  <a:schemeClr val="tx1"/>
+                </a:solidFill>
+                <a:effectLst/>
+                <a:latin typeface="+mn-lt"/>
+                <a:ea typeface="+mn-ea"/>
+                <a:cs typeface="+mn-cs"/>
+              </a:rPr>
+              <a:t>display_menu</a:t>
+            </a:r>
+            <a:r>
+              <a:rPr lang="en-US" sz="1200" kern="1200" dirty="0">
+                <a:solidFill>
+                  <a:schemeClr val="tx1"/>
+                </a:solidFill>
+                <a:effectLst/>
+                <a:latin typeface="+mn-lt"/>
+                <a:ea typeface="+mn-ea"/>
+                <a:cs typeface="+mn-cs"/>
+              </a:rPr>
+              <a:t>()</a:t>
+            </a:r>
+            <a:r>
+              <a:rPr lang="en-US" dirty="0">
+                <a:effectLst/>
+              </a:rPr>
+              <a:t> shows options.</a:t>
+            </a:r>
+          </a:p>
+          <a:p>
+            <a:r>
+              <a:rPr lang="en-US" dirty="0">
+                <a:effectLst/>
+              </a:rPr>
+              <a:t>Input is read and passed to the appropriate function.</a:t>
+            </a:r>
+          </a:p>
+          <a:p>
+            <a:endParaRPr lang="en-PH" dirty="0"/>
+          </a:p>
+        </p:txBody>
+      </p:sp>
+      <p:sp>
+        <p:nvSpPr>
+          <p:cNvPr id="4" name="Slide Number Placeholder 3">
+            <a:extLst>
+              <a:ext uri="{FF2B5EF4-FFF2-40B4-BE49-F238E27FC236}">
+                <a16:creationId xmlns:a16="http://schemas.microsoft.com/office/drawing/2014/main" id="{5D0F0A74-5C16-E37C-E05B-0468DB77B79B}"/>
+              </a:ext>
+            </a:extLst>
+          </p:cNvPr>
+          <p:cNvSpPr>
+            <a:spLocks noGrp="1"/>
+          </p:cNvSpPr>
+          <p:nvPr>
+            <p:ph type="sldNum" sz="quarter" idx="5"/>
+          </p:nvPr>
+        </p:nvSpPr>
+        <p:spPr/>
+        <p:txBody>
+          <a:bodyPr/>
+          <a:lstStyle/>
+          <a:p>
+            <a:fld id="{ACDB7A15-2ED2-485D-9FD2-B8844FDCB40D}" type="slidenum">
+              <a:rPr lang="en-PH" smtClean="0"/>
+              <a:t>27</a:t>
+            </a:fld>
+            <a:endParaRPr lang="en-PH"/>
+          </a:p>
+        </p:txBody>
+      </p:sp>
+    </p:spTree>
+    <p:extLst>
+      <p:ext uri="{BB962C8B-B14F-4D97-AF65-F5344CB8AC3E}">
+        <p14:creationId xmlns:p14="http://schemas.microsoft.com/office/powerpoint/2010/main" val="3924259108"/>
+      </p:ext>
+    </p:extLst>
+  </p:cSld>
+  <p:clrMapOvr>
+    <a:masterClrMapping/>
+  </p:clrMapOvr>
+</p:notes>
+</file>
+
+<file path=ppt/notesSlides/notesSlide5.xml><?xml version="1.0" encoding="utf-8"?>
+<p:notes xmlns:a="http://schemas.openxmlformats.org/drawingml/2006/main" xmlns:r="http://schemas.openxmlformats.org/officeDocument/2006/relationships" xmlns:p="http://schemas.openxmlformats.org/presentationml/2006/main">
+  <p:cSld>
+    <p:spTree>
+      <p:nvGrpSpPr>
+        <p:cNvPr id="1" name="">
+          <a:extLst>
+            <a:ext uri="{FF2B5EF4-FFF2-40B4-BE49-F238E27FC236}">
+              <a16:creationId xmlns:a16="http://schemas.microsoft.com/office/drawing/2014/main" id="{84A2FE83-5D65-DE33-17B2-6167BA18E18A}"/>
+            </a:ext>
+          </a:extLst>
+        </p:cNvPr>
+        <p:cNvGrpSpPr/>
+        <p:nvPr/>
+      </p:nvGrpSpPr>
+      <p:grpSpPr>
+        <a:xfrm>
+          <a:off x="0" y="0"/>
+          <a:ext cx="0" cy="0"/>
+          <a:chOff x="0" y="0"/>
+          <a:chExt cx="0" cy="0"/>
+        </a:xfrm>
+      </p:grpSpPr>
+      <p:sp>
+        <p:nvSpPr>
+          <p:cNvPr id="2" name="Slide Image Placeholder 1">
+            <a:extLst>
+              <a:ext uri="{FF2B5EF4-FFF2-40B4-BE49-F238E27FC236}">
+                <a16:creationId xmlns:a16="http://schemas.microsoft.com/office/drawing/2014/main" id="{81AE02C6-8005-7338-3F65-6187FB367D7C}"/>
+              </a:ext>
+            </a:extLst>
+          </p:cNvPr>
+          <p:cNvSpPr>
+            <a:spLocks noGrp="1" noRot="1" noChangeAspect="1"/>
+          </p:cNvSpPr>
+          <p:nvPr>
+            <p:ph type="sldImg"/>
+          </p:nvPr>
+        </p:nvSpPr>
+        <p:spPr/>
+      </p:sp>
+      <p:sp>
+        <p:nvSpPr>
+          <p:cNvPr id="3" name="Notes Placeholder 2">
+            <a:extLst>
+              <a:ext uri="{FF2B5EF4-FFF2-40B4-BE49-F238E27FC236}">
+                <a16:creationId xmlns:a16="http://schemas.microsoft.com/office/drawing/2014/main" id="{84AB70A2-5984-ED26-FFCC-289E1C8B6AF2}"/>
+              </a:ext>
+            </a:extLst>
+          </p:cNvPr>
+          <p:cNvSpPr>
+            <a:spLocks noGrp="1"/>
+          </p:cNvSpPr>
+          <p:nvPr>
+            <p:ph type="body" idx="1"/>
+          </p:nvPr>
+        </p:nvSpPr>
+        <p:spPr/>
+        <p:txBody>
+          <a:bodyPr/>
+          <a:lstStyle/>
+          <a:p>
+            <a:r>
+              <a:rPr lang="en-US" dirty="0"/>
+              <a:t>To discover files, the app queries other peers. It uses the </a:t>
+            </a:r>
+            <a:r>
+              <a:rPr lang="en-US" sz="1200" kern="1200" dirty="0">
+                <a:solidFill>
+                  <a:schemeClr val="tx1"/>
+                </a:solidFill>
+                <a:effectLst/>
+                <a:latin typeface="+mn-lt"/>
+                <a:ea typeface="+mn-ea"/>
+                <a:cs typeface="+mn-cs"/>
+              </a:rPr>
+              <a:t>Client</a:t>
+            </a:r>
+            <a:r>
+              <a:rPr lang="en-US" dirty="0"/>
+              <a:t> class to connect to each peer’s Host and request their file list. </a:t>
+            </a:r>
+            <a:r>
+              <a:rPr lang="en-US" sz="1200" kern="1200" dirty="0">
+                <a:solidFill>
+                  <a:schemeClr val="tx1"/>
+                </a:solidFill>
+                <a:effectLst/>
+                <a:latin typeface="+mn-lt"/>
+                <a:ea typeface="+mn-ea"/>
+                <a:cs typeface="+mn-cs"/>
+              </a:rPr>
+              <a:t>Client::</a:t>
+            </a:r>
+            <a:r>
+              <a:rPr lang="en-US" sz="1200" kern="1200" dirty="0" err="1">
+                <a:solidFill>
+                  <a:schemeClr val="tx1"/>
+                </a:solidFill>
+                <a:effectLst/>
+                <a:latin typeface="+mn-lt"/>
+                <a:ea typeface="+mn-ea"/>
+                <a:cs typeface="+mn-cs"/>
+              </a:rPr>
+              <a:t>send_choice</a:t>
+            </a:r>
+            <a:r>
+              <a:rPr lang="en-US" sz="1200" kern="1200" dirty="0">
+                <a:solidFill>
+                  <a:schemeClr val="tx1"/>
+                </a:solidFill>
+                <a:effectLst/>
+                <a:latin typeface="+mn-lt"/>
+                <a:ea typeface="+mn-ea"/>
+                <a:cs typeface="+mn-cs"/>
+              </a:rPr>
+              <a:t>(1)</a:t>
+            </a:r>
+            <a:r>
+              <a:rPr lang="en-US" dirty="0">
+                <a:effectLst/>
+              </a:rPr>
+              <a:t> asks for available files.</a:t>
+            </a:r>
+          </a:p>
+          <a:p>
+            <a:r>
+              <a:rPr lang="en-US" sz="1200" kern="1200" dirty="0">
+                <a:solidFill>
+                  <a:schemeClr val="tx1"/>
+                </a:solidFill>
+                <a:effectLst/>
+                <a:latin typeface="+mn-lt"/>
+                <a:ea typeface="+mn-ea"/>
+                <a:cs typeface="+mn-cs"/>
+              </a:rPr>
+              <a:t>Host::</a:t>
+            </a:r>
+            <a:r>
+              <a:rPr lang="en-US" sz="1200" kern="1200" dirty="0" err="1">
+                <a:solidFill>
+                  <a:schemeClr val="tx1"/>
+                </a:solidFill>
+                <a:effectLst/>
+                <a:latin typeface="+mn-lt"/>
+                <a:ea typeface="+mn-ea"/>
+                <a:cs typeface="+mn-cs"/>
+              </a:rPr>
+              <a:t>list_available_files</a:t>
+            </a:r>
+            <a:r>
+              <a:rPr lang="en-US" sz="1200" kern="1200" dirty="0">
+                <a:solidFill>
+                  <a:schemeClr val="tx1"/>
+                </a:solidFill>
+                <a:effectLst/>
+                <a:latin typeface="+mn-lt"/>
+                <a:ea typeface="+mn-ea"/>
+                <a:cs typeface="+mn-cs"/>
+              </a:rPr>
+              <a:t>()</a:t>
+            </a:r>
+            <a:r>
+              <a:rPr lang="en-US" dirty="0">
+                <a:effectLst/>
+              </a:rPr>
+              <a:t> responds with filenames and sizes.</a:t>
+            </a:r>
+          </a:p>
+          <a:p>
+            <a:r>
+              <a:rPr lang="en-US" sz="1200" kern="1200" dirty="0" err="1">
+                <a:solidFill>
+                  <a:schemeClr val="tx1"/>
+                </a:solidFill>
+                <a:effectLst/>
+                <a:latin typeface="+mn-lt"/>
+                <a:ea typeface="+mn-ea"/>
+                <a:cs typeface="+mn-cs"/>
+              </a:rPr>
+              <a:t>seed_app</a:t>
+            </a:r>
+            <a:r>
+              <a:rPr lang="en-US" sz="1200" kern="1200" dirty="0">
+                <a:solidFill>
+                  <a:schemeClr val="tx1"/>
+                </a:solidFill>
+                <a:effectLst/>
+                <a:latin typeface="+mn-lt"/>
+                <a:ea typeface="+mn-ea"/>
+                <a:cs typeface="+mn-cs"/>
+              </a:rPr>
+              <a:t>::</a:t>
+            </a:r>
+            <a:r>
+              <a:rPr lang="en-US" sz="1200" kern="1200" dirty="0" err="1">
+                <a:solidFill>
+                  <a:schemeClr val="tx1"/>
+                </a:solidFill>
+                <a:effectLst/>
+                <a:latin typeface="+mn-lt"/>
+                <a:ea typeface="+mn-ea"/>
+                <a:cs typeface="+mn-cs"/>
+              </a:rPr>
+              <a:t>list_unique_files</a:t>
+            </a:r>
+            <a:r>
+              <a:rPr lang="en-US" sz="1200" kern="1200" dirty="0">
+                <a:solidFill>
+                  <a:schemeClr val="tx1"/>
+                </a:solidFill>
+                <a:effectLst/>
+                <a:latin typeface="+mn-lt"/>
+                <a:ea typeface="+mn-ea"/>
+                <a:cs typeface="+mn-cs"/>
+              </a:rPr>
+              <a:t>()</a:t>
+            </a:r>
+            <a:r>
+              <a:rPr lang="en-US" dirty="0">
+                <a:effectLst/>
+              </a:rPr>
+              <a:t> parses replies, removes duplicates, and wraps each file in a </a:t>
+            </a:r>
+            <a:r>
+              <a:rPr lang="en-US" sz="1200" kern="1200" dirty="0" err="1">
+                <a:solidFill>
+                  <a:schemeClr val="tx1"/>
+                </a:solidFill>
+                <a:effectLst/>
+                <a:latin typeface="+mn-lt"/>
+                <a:ea typeface="+mn-ea"/>
+                <a:cs typeface="+mn-cs"/>
+              </a:rPr>
+              <a:t>network_file</a:t>
+            </a:r>
+            <a:r>
+              <a:rPr lang="en-US" dirty="0">
+                <a:effectLst/>
+              </a:rPr>
+              <a:t> object.</a:t>
+            </a:r>
+          </a:p>
+          <a:p>
+            <a:endParaRPr lang="en-PH" dirty="0"/>
+          </a:p>
+        </p:txBody>
+      </p:sp>
+      <p:sp>
+        <p:nvSpPr>
+          <p:cNvPr id="4" name="Slide Number Placeholder 3">
+            <a:extLst>
+              <a:ext uri="{FF2B5EF4-FFF2-40B4-BE49-F238E27FC236}">
+                <a16:creationId xmlns:a16="http://schemas.microsoft.com/office/drawing/2014/main" id="{E743BB7F-8D0A-52DF-C1FB-51677C0DA28F}"/>
+              </a:ext>
+            </a:extLst>
+          </p:cNvPr>
+          <p:cNvSpPr>
+            <a:spLocks noGrp="1"/>
+          </p:cNvSpPr>
+          <p:nvPr>
+            <p:ph type="sldNum" sz="quarter" idx="5"/>
+          </p:nvPr>
+        </p:nvSpPr>
+        <p:spPr/>
+        <p:txBody>
+          <a:bodyPr/>
+          <a:lstStyle/>
+          <a:p>
+            <a:fld id="{ACDB7A15-2ED2-485D-9FD2-B8844FDCB40D}" type="slidenum">
+              <a:rPr lang="en-PH" smtClean="0"/>
+              <a:t>28</a:t>
+            </a:fld>
+            <a:endParaRPr lang="en-PH"/>
+          </a:p>
+        </p:txBody>
+      </p:sp>
+    </p:spTree>
+    <p:extLst>
+      <p:ext uri="{BB962C8B-B14F-4D97-AF65-F5344CB8AC3E}">
+        <p14:creationId xmlns:p14="http://schemas.microsoft.com/office/powerpoint/2010/main" val="3767816448"/>
+      </p:ext>
+    </p:extLst>
+  </p:cSld>
+  <p:clrMapOvr>
+    <a:masterClrMapping/>
+  </p:clrMapOvr>
+</p:notes>
+</file>
+
+<file path=ppt/notesSlides/notesSlide6.xml><?xml version="1.0" encoding="utf-8"?>
+<p:notes xmlns:a="http://schemas.openxmlformats.org/drawingml/2006/main" xmlns:r="http://schemas.openxmlformats.org/officeDocument/2006/relationships" xmlns:p="http://schemas.openxmlformats.org/presentationml/2006/main">
+  <p:cSld>
+    <p:spTree>
+      <p:nvGrpSpPr>
+        <p:cNvPr id="1" name="">
+          <a:extLst>
+            <a:ext uri="{FF2B5EF4-FFF2-40B4-BE49-F238E27FC236}">
+              <a16:creationId xmlns:a16="http://schemas.microsoft.com/office/drawing/2014/main" id="{36DDD44F-ED3F-AF6E-CD51-6160A296DAF2}"/>
+            </a:ext>
+          </a:extLst>
+        </p:cNvPr>
+        <p:cNvGrpSpPr/>
+        <p:nvPr/>
+      </p:nvGrpSpPr>
+      <p:grpSpPr>
+        <a:xfrm>
+          <a:off x="0" y="0"/>
+          <a:ext cx="0" cy="0"/>
+          <a:chOff x="0" y="0"/>
+          <a:chExt cx="0" cy="0"/>
+        </a:xfrm>
+      </p:grpSpPr>
+      <p:sp>
+        <p:nvSpPr>
+          <p:cNvPr id="2" name="Slide Image Placeholder 1">
+            <a:extLst>
+              <a:ext uri="{FF2B5EF4-FFF2-40B4-BE49-F238E27FC236}">
+                <a16:creationId xmlns:a16="http://schemas.microsoft.com/office/drawing/2014/main" id="{273FB144-F62F-EC8E-83E5-FA71226BCF94}"/>
+              </a:ext>
+            </a:extLst>
+          </p:cNvPr>
+          <p:cNvSpPr>
+            <a:spLocks noGrp="1" noRot="1" noChangeAspect="1"/>
+          </p:cNvSpPr>
+          <p:nvPr>
+            <p:ph type="sldImg"/>
+          </p:nvPr>
+        </p:nvSpPr>
+        <p:spPr/>
+      </p:sp>
+      <p:sp>
+        <p:nvSpPr>
+          <p:cNvPr id="3" name="Notes Placeholder 2">
+            <a:extLst>
+              <a:ext uri="{FF2B5EF4-FFF2-40B4-BE49-F238E27FC236}">
+                <a16:creationId xmlns:a16="http://schemas.microsoft.com/office/drawing/2014/main" id="{4C1C0208-2CFB-559D-B6A3-FE7F9376AFD5}"/>
+              </a:ext>
+            </a:extLst>
+          </p:cNvPr>
+          <p:cNvSpPr>
+            <a:spLocks noGrp="1"/>
+          </p:cNvSpPr>
+          <p:nvPr>
+            <p:ph type="body" idx="1"/>
+          </p:nvPr>
+        </p:nvSpPr>
+        <p:spPr/>
+        <p:txBody>
+          <a:bodyPr/>
+          <a:lstStyle/>
+          <a:p>
+            <a:r>
+              <a:rPr lang="en-US" dirty="0"/>
+              <a:t>A </a:t>
+            </a:r>
+            <a:r>
+              <a:rPr lang="en-US" sz="1200" kern="1200" dirty="0" err="1">
+                <a:solidFill>
+                  <a:schemeClr val="tx1"/>
+                </a:solidFill>
+                <a:effectLst/>
+                <a:latin typeface="+mn-lt"/>
+                <a:ea typeface="+mn-ea"/>
+                <a:cs typeface="+mn-cs"/>
+              </a:rPr>
+              <a:t>network_file</a:t>
+            </a:r>
+            <a:r>
+              <a:rPr lang="en-US" dirty="0"/>
+              <a:t> represents a candidate file in the network. It contains metadata (</a:t>
+            </a:r>
+            <a:r>
+              <a:rPr lang="en-US" sz="1200" kern="1200" dirty="0">
+                <a:solidFill>
+                  <a:schemeClr val="tx1"/>
+                </a:solidFill>
+                <a:effectLst/>
+                <a:latin typeface="+mn-lt"/>
+                <a:ea typeface="+mn-ea"/>
+                <a:cs typeface="+mn-cs"/>
+              </a:rPr>
+              <a:t>File</a:t>
+            </a:r>
+            <a:r>
+              <a:rPr lang="en-US" dirty="0"/>
+              <a:t>) and a list of seeders that host it.</a:t>
+            </a:r>
+          </a:p>
+          <a:p>
+            <a:r>
+              <a:rPr lang="en-US" sz="1200" kern="1200" dirty="0" err="1">
+                <a:solidFill>
+                  <a:schemeClr val="tx1"/>
+                </a:solidFill>
+                <a:effectLst/>
+                <a:latin typeface="+mn-lt"/>
+                <a:ea typeface="+mn-ea"/>
+                <a:cs typeface="+mn-cs"/>
+              </a:rPr>
+              <a:t>network_file</a:t>
+            </a:r>
+            <a:r>
+              <a:rPr lang="en-US" sz="1200" kern="1200" dirty="0">
+                <a:solidFill>
+                  <a:schemeClr val="tx1"/>
+                </a:solidFill>
+                <a:effectLst/>
+                <a:latin typeface="+mn-lt"/>
+                <a:ea typeface="+mn-ea"/>
+                <a:cs typeface="+mn-cs"/>
+              </a:rPr>
+              <a:t>::get_info()</a:t>
+            </a:r>
+            <a:r>
+              <a:rPr lang="en-US" dirty="0">
+                <a:effectLst/>
+              </a:rPr>
+              <a:t> returns file details.</a:t>
+            </a:r>
+          </a:p>
+          <a:p>
+            <a:r>
+              <a:rPr lang="en-US" sz="1200" kern="1200" dirty="0" err="1">
+                <a:solidFill>
+                  <a:schemeClr val="tx1"/>
+                </a:solidFill>
+                <a:effectLst/>
+                <a:latin typeface="+mn-lt"/>
+                <a:ea typeface="+mn-ea"/>
+                <a:cs typeface="+mn-cs"/>
+              </a:rPr>
+              <a:t>network_file</a:t>
+            </a:r>
+            <a:r>
+              <a:rPr lang="en-US" sz="1200" kern="1200" dirty="0">
+                <a:solidFill>
+                  <a:schemeClr val="tx1"/>
+                </a:solidFill>
+                <a:effectLst/>
+                <a:latin typeface="+mn-lt"/>
+                <a:ea typeface="+mn-ea"/>
+                <a:cs typeface="+mn-cs"/>
+              </a:rPr>
+              <a:t>::add_seeder()</a:t>
+            </a:r>
+            <a:r>
+              <a:rPr lang="en-US" dirty="0">
+                <a:effectLst/>
+              </a:rPr>
+              <a:t> adds peers that have the file.</a:t>
+            </a:r>
+          </a:p>
+          <a:p>
+            <a:endParaRPr lang="en-PH" dirty="0"/>
+          </a:p>
+        </p:txBody>
+      </p:sp>
+      <p:sp>
+        <p:nvSpPr>
+          <p:cNvPr id="4" name="Slide Number Placeholder 3">
+            <a:extLst>
+              <a:ext uri="{FF2B5EF4-FFF2-40B4-BE49-F238E27FC236}">
+                <a16:creationId xmlns:a16="http://schemas.microsoft.com/office/drawing/2014/main" id="{A239514C-A6D1-FFD6-AB30-812D5CB5BFB2}"/>
+              </a:ext>
+            </a:extLst>
+          </p:cNvPr>
+          <p:cNvSpPr>
+            <a:spLocks noGrp="1"/>
+          </p:cNvSpPr>
+          <p:nvPr>
+            <p:ph type="sldNum" sz="quarter" idx="5"/>
+          </p:nvPr>
+        </p:nvSpPr>
+        <p:spPr/>
+        <p:txBody>
+          <a:bodyPr/>
+          <a:lstStyle/>
+          <a:p>
+            <a:fld id="{ACDB7A15-2ED2-485D-9FD2-B8844FDCB40D}" type="slidenum">
+              <a:rPr lang="en-PH" smtClean="0"/>
+              <a:t>29</a:t>
+            </a:fld>
+            <a:endParaRPr lang="en-PH"/>
+          </a:p>
+        </p:txBody>
+      </p:sp>
+    </p:spTree>
+    <p:extLst>
+      <p:ext uri="{BB962C8B-B14F-4D97-AF65-F5344CB8AC3E}">
+        <p14:creationId xmlns:p14="http://schemas.microsoft.com/office/powerpoint/2010/main" val="2805173726"/>
+      </p:ext>
+    </p:extLst>
+  </p:cSld>
+  <p:clrMapOvr>
+    <a:masterClrMapping/>
+  </p:clrMapOvr>
+</p:notes>
+</file>
+
+<file path=ppt/notesSlides/notesSlide7.xml><?xml version="1.0" encoding="utf-8"?>
+<p:notes xmlns:a="http://schemas.openxmlformats.org/drawingml/2006/main" xmlns:r="http://schemas.openxmlformats.org/officeDocument/2006/relationships" xmlns:p="http://schemas.openxmlformats.org/presentationml/2006/main">
+  <p:cSld>
+    <p:spTree>
+      <p:nvGrpSpPr>
+        <p:cNvPr id="1" name="">
+          <a:extLst>
+            <a:ext uri="{FF2B5EF4-FFF2-40B4-BE49-F238E27FC236}">
+              <a16:creationId xmlns:a16="http://schemas.microsoft.com/office/drawing/2014/main" id="{217F0FB8-A43C-3CE8-78E8-E7C9ECA4E1B2}"/>
+            </a:ext>
+          </a:extLst>
+        </p:cNvPr>
+        <p:cNvGrpSpPr/>
+        <p:nvPr/>
+      </p:nvGrpSpPr>
+      <p:grpSpPr>
+        <a:xfrm>
+          <a:off x="0" y="0"/>
+          <a:ext cx="0" cy="0"/>
+          <a:chOff x="0" y="0"/>
+          <a:chExt cx="0" cy="0"/>
+        </a:xfrm>
+      </p:grpSpPr>
+      <p:sp>
+        <p:nvSpPr>
+          <p:cNvPr id="2" name="Slide Image Placeholder 1">
+            <a:extLst>
+              <a:ext uri="{FF2B5EF4-FFF2-40B4-BE49-F238E27FC236}">
+                <a16:creationId xmlns:a16="http://schemas.microsoft.com/office/drawing/2014/main" id="{4E72A552-6F58-5A60-C648-09C511E185C1}"/>
+              </a:ext>
+            </a:extLst>
+          </p:cNvPr>
+          <p:cNvSpPr>
+            <a:spLocks noGrp="1" noRot="1" noChangeAspect="1"/>
+          </p:cNvSpPr>
+          <p:nvPr>
+            <p:ph type="sldImg"/>
+          </p:nvPr>
+        </p:nvSpPr>
+        <p:spPr/>
+      </p:sp>
+      <p:sp>
+        <p:nvSpPr>
+          <p:cNvPr id="3" name="Notes Placeholder 2">
+            <a:extLst>
+              <a:ext uri="{FF2B5EF4-FFF2-40B4-BE49-F238E27FC236}">
+                <a16:creationId xmlns:a16="http://schemas.microsoft.com/office/drawing/2014/main" id="{7B0B2D02-0791-65C6-9F55-EB6376AE97D4}"/>
+              </a:ext>
+            </a:extLst>
+          </p:cNvPr>
+          <p:cNvSpPr>
+            <a:spLocks noGrp="1"/>
+          </p:cNvSpPr>
+          <p:nvPr>
+            <p:ph type="body" idx="1"/>
+          </p:nvPr>
+        </p:nvSpPr>
+        <p:spPr/>
+        <p:txBody>
+          <a:bodyPr/>
+          <a:lstStyle/>
+          <a:p>
+            <a:r>
+              <a:rPr lang="en-US" dirty="0"/>
+              <a:t>Once the user selects a file, the app needs to check which seeders are actually reachable. That’s where the </a:t>
+            </a:r>
+            <a:r>
+              <a:rPr lang="en-US" sz="1200" kern="1200" dirty="0" err="1">
+                <a:solidFill>
+                  <a:schemeClr val="tx1"/>
+                </a:solidFill>
+                <a:effectLst/>
+                <a:latin typeface="+mn-lt"/>
+                <a:ea typeface="+mn-ea"/>
+                <a:cs typeface="+mn-cs"/>
+              </a:rPr>
+              <a:t>AppSeederResolver</a:t>
+            </a:r>
+            <a:r>
+              <a:rPr lang="en-US" dirty="0"/>
+              <a:t> and </a:t>
+            </a:r>
+            <a:r>
+              <a:rPr lang="en-US" sz="1200" kern="1200" dirty="0" err="1">
+                <a:solidFill>
+                  <a:schemeClr val="tx1"/>
+                </a:solidFill>
+                <a:effectLst/>
+                <a:latin typeface="+mn-lt"/>
+                <a:ea typeface="+mn-ea"/>
+                <a:cs typeface="+mn-cs"/>
+              </a:rPr>
+              <a:t>SeederProbe</a:t>
+            </a:r>
+            <a:r>
+              <a:rPr lang="en-US" dirty="0"/>
+              <a:t> come in.</a:t>
+            </a:r>
+          </a:p>
+          <a:p>
+            <a:endParaRPr lang="en-US" dirty="0"/>
+          </a:p>
+          <a:p>
+            <a:r>
+              <a:rPr lang="en-US" sz="1200" kern="1200" dirty="0" err="1">
+                <a:solidFill>
+                  <a:schemeClr val="tx1"/>
+                </a:solidFill>
+                <a:effectLst/>
+                <a:latin typeface="+mn-lt"/>
+                <a:ea typeface="+mn-ea"/>
+                <a:cs typeface="+mn-cs"/>
+              </a:rPr>
+              <a:t>AppSeederResolver</a:t>
+            </a:r>
+            <a:r>
+              <a:rPr lang="en-US" sz="1200" kern="1200" dirty="0">
+                <a:solidFill>
+                  <a:schemeClr val="tx1"/>
+                </a:solidFill>
+                <a:effectLst/>
+                <a:latin typeface="+mn-lt"/>
+                <a:ea typeface="+mn-ea"/>
+                <a:cs typeface="+mn-cs"/>
+              </a:rPr>
+              <a:t>::resolve()</a:t>
+            </a:r>
+            <a:r>
+              <a:rPr lang="en-US" dirty="0">
+                <a:effectLst/>
+              </a:rPr>
+              <a:t> calls </a:t>
+            </a:r>
+            <a:r>
+              <a:rPr lang="en-US" sz="1200" kern="1200" dirty="0" err="1">
+                <a:solidFill>
+                  <a:schemeClr val="tx1"/>
+                </a:solidFill>
+                <a:effectLst/>
+                <a:latin typeface="+mn-lt"/>
+                <a:ea typeface="+mn-ea"/>
+                <a:cs typeface="+mn-cs"/>
+              </a:rPr>
+              <a:t>SeederProbe</a:t>
+            </a:r>
+            <a:r>
+              <a:rPr lang="en-US" sz="1200" kern="1200" dirty="0">
+                <a:solidFill>
+                  <a:schemeClr val="tx1"/>
+                </a:solidFill>
+                <a:effectLst/>
+                <a:latin typeface="+mn-lt"/>
+                <a:ea typeface="+mn-ea"/>
+                <a:cs typeface="+mn-cs"/>
+              </a:rPr>
+              <a:t>::probe()</a:t>
+            </a:r>
+            <a:r>
+              <a:rPr lang="en-US" dirty="0">
+                <a:effectLst/>
+              </a:rPr>
+              <a:t>.</a:t>
+            </a:r>
+          </a:p>
+          <a:p>
+            <a:r>
+              <a:rPr lang="en-US" sz="1200" kern="1200" dirty="0" err="1">
+                <a:solidFill>
+                  <a:schemeClr val="tx1"/>
+                </a:solidFill>
+                <a:effectLst/>
+                <a:latin typeface="+mn-lt"/>
+                <a:ea typeface="+mn-ea"/>
+                <a:cs typeface="+mn-cs"/>
+              </a:rPr>
+              <a:t>SeederProbe</a:t>
+            </a:r>
+            <a:r>
+              <a:rPr lang="en-US" dirty="0">
+                <a:effectLst/>
+              </a:rPr>
+              <a:t> connects to each candidate seeder using </a:t>
+            </a:r>
+            <a:r>
+              <a:rPr lang="en-US" sz="1200" kern="1200" dirty="0">
+                <a:solidFill>
+                  <a:schemeClr val="tx1"/>
+                </a:solidFill>
+                <a:effectLst/>
+                <a:latin typeface="+mn-lt"/>
+                <a:ea typeface="+mn-ea"/>
+                <a:cs typeface="+mn-cs"/>
+              </a:rPr>
+              <a:t>Client</a:t>
+            </a:r>
+            <a:r>
+              <a:rPr lang="en-US" dirty="0">
+                <a:effectLst/>
+              </a:rPr>
+              <a:t>, sends a ‘have file’ request, and validates the reply.</a:t>
+            </a:r>
+          </a:p>
+          <a:p>
+            <a:r>
+              <a:rPr lang="en-US" dirty="0">
+                <a:effectLst/>
+              </a:rPr>
+              <a:t>Only reachable seeders are returned.</a:t>
+            </a:r>
+          </a:p>
+          <a:p>
+            <a:endParaRPr lang="en-US" dirty="0"/>
+          </a:p>
+          <a:p>
+            <a:endParaRPr lang="en-PH" dirty="0"/>
+          </a:p>
+        </p:txBody>
+      </p:sp>
+      <p:sp>
+        <p:nvSpPr>
+          <p:cNvPr id="4" name="Slide Number Placeholder 3">
+            <a:extLst>
+              <a:ext uri="{FF2B5EF4-FFF2-40B4-BE49-F238E27FC236}">
+                <a16:creationId xmlns:a16="http://schemas.microsoft.com/office/drawing/2014/main" id="{107D0AFD-A0E5-3CB8-C77E-A611CA0A8EB6}"/>
+              </a:ext>
+            </a:extLst>
+          </p:cNvPr>
+          <p:cNvSpPr>
+            <a:spLocks noGrp="1"/>
+          </p:cNvSpPr>
+          <p:nvPr>
+            <p:ph type="sldNum" sz="quarter" idx="5"/>
+          </p:nvPr>
+        </p:nvSpPr>
+        <p:spPr/>
+        <p:txBody>
+          <a:bodyPr/>
+          <a:lstStyle/>
+          <a:p>
+            <a:fld id="{ACDB7A15-2ED2-485D-9FD2-B8844FDCB40D}" type="slidenum">
+              <a:rPr lang="en-PH" smtClean="0"/>
+              <a:t>30</a:t>
+            </a:fld>
+            <a:endParaRPr lang="en-PH"/>
+          </a:p>
+        </p:txBody>
+      </p:sp>
+    </p:spTree>
+    <p:extLst>
+      <p:ext uri="{BB962C8B-B14F-4D97-AF65-F5344CB8AC3E}">
+        <p14:creationId xmlns:p14="http://schemas.microsoft.com/office/powerpoint/2010/main" val="4127456297"/>
+      </p:ext>
+    </p:extLst>
+  </p:cSld>
+  <p:clrMapOvr>
+    <a:masterClrMapping/>
+  </p:clrMapOvr>
+</p:notes>
+</file>
+
+<file path=ppt/notesSlides/notesSlide8.xml><?xml version="1.0" encoding="utf-8"?>
+<p:notes xmlns:a="http://schemas.openxmlformats.org/drawingml/2006/main" xmlns:r="http://schemas.openxmlformats.org/officeDocument/2006/relationships" xmlns:p="http://schemas.openxmlformats.org/presentationml/2006/main">
+  <p:cSld>
+    <p:spTree>
+      <p:nvGrpSpPr>
+        <p:cNvPr id="1" name="">
+          <a:extLst>
+            <a:ext uri="{FF2B5EF4-FFF2-40B4-BE49-F238E27FC236}">
+              <a16:creationId xmlns:a16="http://schemas.microsoft.com/office/drawing/2014/main" id="{29438E38-AFCD-79A1-966C-759CFE2E5063}"/>
+            </a:ext>
+          </a:extLst>
+        </p:cNvPr>
+        <p:cNvGrpSpPr/>
+        <p:nvPr/>
+      </p:nvGrpSpPr>
+      <p:grpSpPr>
+        <a:xfrm>
+          <a:off x="0" y="0"/>
+          <a:ext cx="0" cy="0"/>
+          <a:chOff x="0" y="0"/>
+          <a:chExt cx="0" cy="0"/>
+        </a:xfrm>
+      </p:grpSpPr>
+      <p:sp>
+        <p:nvSpPr>
+          <p:cNvPr id="2" name="Slide Image Placeholder 1">
+            <a:extLst>
+              <a:ext uri="{FF2B5EF4-FFF2-40B4-BE49-F238E27FC236}">
+                <a16:creationId xmlns:a16="http://schemas.microsoft.com/office/drawing/2014/main" id="{4A157705-1CAD-32A3-512F-883046BFE34B}"/>
+              </a:ext>
+            </a:extLst>
+          </p:cNvPr>
+          <p:cNvSpPr>
+            <a:spLocks noGrp="1" noRot="1" noChangeAspect="1"/>
+          </p:cNvSpPr>
+          <p:nvPr>
+            <p:ph type="sldImg"/>
+          </p:nvPr>
+        </p:nvSpPr>
+        <p:spPr/>
+      </p:sp>
+      <p:sp>
+        <p:nvSpPr>
+          <p:cNvPr id="3" name="Notes Placeholder 2">
+            <a:extLst>
+              <a:ext uri="{FF2B5EF4-FFF2-40B4-BE49-F238E27FC236}">
+                <a16:creationId xmlns:a16="http://schemas.microsoft.com/office/drawing/2014/main" id="{EB6D9D0E-1DD9-638D-5135-BE79C50345BA}"/>
+              </a:ext>
+            </a:extLst>
+          </p:cNvPr>
+          <p:cNvSpPr>
+            <a:spLocks noGrp="1"/>
+          </p:cNvSpPr>
+          <p:nvPr>
+            <p:ph type="body" idx="1"/>
+          </p:nvPr>
+        </p:nvSpPr>
+        <p:spPr/>
+        <p:txBody>
+          <a:bodyPr/>
+          <a:lstStyle/>
+          <a:p>
+            <a:r>
+              <a:rPr lang="en-US" dirty="0"/>
+              <a:t>With live seeders identified, the </a:t>
+            </a:r>
+            <a:r>
+              <a:rPr lang="en-US" sz="1200" kern="1200" dirty="0" err="1">
+                <a:solidFill>
+                  <a:schemeClr val="tx1"/>
+                </a:solidFill>
+                <a:effectLst/>
+                <a:latin typeface="+mn-lt"/>
+                <a:ea typeface="+mn-ea"/>
+                <a:cs typeface="+mn-cs"/>
+              </a:rPr>
+              <a:t>download_manager</a:t>
+            </a:r>
+            <a:r>
+              <a:rPr lang="en-US" dirty="0"/>
+              <a:t> creates a new </a:t>
+            </a:r>
+            <a:r>
+              <a:rPr lang="en-US" sz="1200" kern="1200" dirty="0">
+                <a:solidFill>
+                  <a:schemeClr val="tx1"/>
+                </a:solidFill>
+                <a:effectLst/>
+                <a:latin typeface="+mn-lt"/>
+                <a:ea typeface="+mn-ea"/>
+                <a:cs typeface="+mn-cs"/>
+              </a:rPr>
+              <a:t>download</a:t>
+            </a:r>
+            <a:r>
+              <a:rPr lang="en-US" dirty="0"/>
+              <a:t> job. It pre‑sizes a </a:t>
+            </a:r>
+            <a:r>
+              <a:rPr lang="en-US" sz="1200" kern="1200" dirty="0">
+                <a:solidFill>
+                  <a:schemeClr val="tx1"/>
+                </a:solidFill>
+                <a:effectLst/>
+                <a:latin typeface="+mn-lt"/>
+                <a:ea typeface="+mn-ea"/>
+                <a:cs typeface="+mn-cs"/>
+              </a:rPr>
+              <a:t>.part</a:t>
+            </a:r>
+            <a:r>
+              <a:rPr lang="en-US" dirty="0"/>
+              <a:t> file, initializes chunk states, and spawns worker threads for each seeder.</a:t>
+            </a:r>
+          </a:p>
+          <a:p>
+            <a:r>
+              <a:rPr lang="en-US" sz="1200" kern="1200" dirty="0" err="1">
+                <a:solidFill>
+                  <a:schemeClr val="tx1"/>
+                </a:solidFill>
+                <a:effectLst/>
+                <a:latin typeface="+mn-lt"/>
+                <a:ea typeface="+mn-ea"/>
+                <a:cs typeface="+mn-cs"/>
+              </a:rPr>
+              <a:t>download_manager</a:t>
+            </a:r>
+            <a:r>
+              <a:rPr lang="en-US" sz="1200" kern="1200" dirty="0">
+                <a:solidFill>
+                  <a:schemeClr val="tx1"/>
+                </a:solidFill>
+                <a:effectLst/>
+                <a:latin typeface="+mn-lt"/>
+                <a:ea typeface="+mn-ea"/>
+                <a:cs typeface="+mn-cs"/>
+              </a:rPr>
+              <a:t>::</a:t>
+            </a:r>
+            <a:r>
+              <a:rPr lang="en-US" sz="1200" kern="1200" dirty="0" err="1">
+                <a:solidFill>
+                  <a:schemeClr val="tx1"/>
+                </a:solidFill>
+                <a:effectLst/>
+                <a:latin typeface="+mn-lt"/>
+                <a:ea typeface="+mn-ea"/>
+                <a:cs typeface="+mn-cs"/>
+              </a:rPr>
+              <a:t>add_download</a:t>
+            </a:r>
+            <a:r>
+              <a:rPr lang="en-US" sz="1200" kern="1200" dirty="0">
+                <a:solidFill>
+                  <a:schemeClr val="tx1"/>
+                </a:solidFill>
+                <a:effectLst/>
+                <a:latin typeface="+mn-lt"/>
+                <a:ea typeface="+mn-ea"/>
+                <a:cs typeface="+mn-cs"/>
+              </a:rPr>
+              <a:t>()</a:t>
+            </a:r>
+            <a:r>
+              <a:rPr lang="en-US" dirty="0">
+                <a:effectLst/>
+              </a:rPr>
+              <a:t> sets up the job.</a:t>
+            </a:r>
+          </a:p>
+          <a:p>
+            <a:r>
+              <a:rPr lang="en-US" sz="1200" kern="1200" dirty="0">
+                <a:solidFill>
+                  <a:schemeClr val="tx1"/>
+                </a:solidFill>
+                <a:effectLst/>
+                <a:latin typeface="+mn-lt"/>
+                <a:ea typeface="+mn-ea"/>
+                <a:cs typeface="+mn-cs"/>
+              </a:rPr>
+              <a:t>download</a:t>
+            </a:r>
+            <a:r>
+              <a:rPr lang="en-US" dirty="0">
+                <a:effectLst/>
+              </a:rPr>
+              <a:t> stores file key, chunk states, progress counters, and error messages.</a:t>
+            </a:r>
+          </a:p>
+          <a:p>
+            <a:r>
+              <a:rPr lang="en-US" sz="1200" kern="1200" dirty="0" err="1">
+                <a:solidFill>
+                  <a:schemeClr val="tx1"/>
+                </a:solidFill>
+                <a:effectLst/>
+                <a:latin typeface="+mn-lt"/>
+                <a:ea typeface="+mn-ea"/>
+                <a:cs typeface="+mn-cs"/>
+              </a:rPr>
+              <a:t>spawn_worker_for</a:t>
+            </a:r>
+            <a:r>
+              <a:rPr lang="en-US" sz="1200" kern="1200" dirty="0">
+                <a:solidFill>
+                  <a:schemeClr val="tx1"/>
+                </a:solidFill>
+                <a:effectLst/>
+                <a:latin typeface="+mn-lt"/>
+                <a:ea typeface="+mn-ea"/>
+                <a:cs typeface="+mn-cs"/>
+              </a:rPr>
+              <a:t>()</a:t>
+            </a:r>
+            <a:r>
+              <a:rPr lang="en-US" dirty="0">
+                <a:effectLst/>
+              </a:rPr>
+              <a:t> creates threads to fetch chunks.</a:t>
+            </a:r>
+          </a:p>
+          <a:p>
+            <a:endParaRPr lang="en-PH" dirty="0"/>
+          </a:p>
+        </p:txBody>
+      </p:sp>
+      <p:sp>
+        <p:nvSpPr>
+          <p:cNvPr id="4" name="Slide Number Placeholder 3">
+            <a:extLst>
+              <a:ext uri="{FF2B5EF4-FFF2-40B4-BE49-F238E27FC236}">
+                <a16:creationId xmlns:a16="http://schemas.microsoft.com/office/drawing/2014/main" id="{ACCD98F5-DE92-8915-489D-3187EF90DC5A}"/>
+              </a:ext>
+            </a:extLst>
+          </p:cNvPr>
+          <p:cNvSpPr>
+            <a:spLocks noGrp="1"/>
+          </p:cNvSpPr>
+          <p:nvPr>
+            <p:ph type="sldNum" sz="quarter" idx="5"/>
+          </p:nvPr>
+        </p:nvSpPr>
+        <p:spPr/>
+        <p:txBody>
+          <a:bodyPr/>
+          <a:lstStyle/>
+          <a:p>
+            <a:fld id="{ACDB7A15-2ED2-485D-9FD2-B8844FDCB40D}" type="slidenum">
+              <a:rPr lang="en-PH" smtClean="0"/>
+              <a:t>31</a:t>
+            </a:fld>
+            <a:endParaRPr lang="en-PH"/>
+          </a:p>
+        </p:txBody>
+      </p:sp>
+    </p:spTree>
+    <p:extLst>
+      <p:ext uri="{BB962C8B-B14F-4D97-AF65-F5344CB8AC3E}">
+        <p14:creationId xmlns:p14="http://schemas.microsoft.com/office/powerpoint/2010/main" val="3725753823"/>
+      </p:ext>
+    </p:extLst>
+  </p:cSld>
+  <p:clrMapOvr>
+    <a:masterClrMapping/>
+  </p:clrMapOvr>
+</p:notes>
+</file>
+
+<file path=ppt/notesSlides/notesSlide9.xml><?xml version="1.0" encoding="utf-8"?>
+<p:notes xmlns:a="http://schemas.openxmlformats.org/drawingml/2006/main" xmlns:r="http://schemas.openxmlformats.org/officeDocument/2006/relationships" xmlns:p="http://schemas.openxmlformats.org/presentationml/2006/main">
+  <p:cSld>
+    <p:spTree>
+      <p:nvGrpSpPr>
+        <p:cNvPr id="1" name="">
+          <a:extLst>
+            <a:ext uri="{FF2B5EF4-FFF2-40B4-BE49-F238E27FC236}">
+              <a16:creationId xmlns:a16="http://schemas.microsoft.com/office/drawing/2014/main" id="{2078AD7D-4034-C07A-DAB1-E480E015FD68}"/>
+            </a:ext>
+          </a:extLst>
+        </p:cNvPr>
+        <p:cNvGrpSpPr/>
+        <p:nvPr/>
+      </p:nvGrpSpPr>
+      <p:grpSpPr>
+        <a:xfrm>
+          <a:off x="0" y="0"/>
+          <a:ext cx="0" cy="0"/>
+          <a:chOff x="0" y="0"/>
+          <a:chExt cx="0" cy="0"/>
+        </a:xfrm>
+      </p:grpSpPr>
+      <p:sp>
+        <p:nvSpPr>
+          <p:cNvPr id="2" name="Slide Image Placeholder 1">
+            <a:extLst>
+              <a:ext uri="{FF2B5EF4-FFF2-40B4-BE49-F238E27FC236}">
+                <a16:creationId xmlns:a16="http://schemas.microsoft.com/office/drawing/2014/main" id="{81A0ED4F-60DC-766D-FF9B-D289725A9509}"/>
+              </a:ext>
+            </a:extLst>
+          </p:cNvPr>
+          <p:cNvSpPr>
+            <a:spLocks noGrp="1" noRot="1" noChangeAspect="1"/>
+          </p:cNvSpPr>
+          <p:nvPr>
+            <p:ph type="sldImg"/>
+          </p:nvPr>
+        </p:nvSpPr>
+        <p:spPr/>
+      </p:sp>
+      <p:sp>
+        <p:nvSpPr>
+          <p:cNvPr id="3" name="Notes Placeholder 2">
+            <a:extLst>
+              <a:ext uri="{FF2B5EF4-FFF2-40B4-BE49-F238E27FC236}">
+                <a16:creationId xmlns:a16="http://schemas.microsoft.com/office/drawing/2014/main" id="{D8B333E8-02ED-1220-1D9D-20BED09FFF19}"/>
+              </a:ext>
+            </a:extLst>
+          </p:cNvPr>
+          <p:cNvSpPr>
+            <a:spLocks noGrp="1"/>
+          </p:cNvSpPr>
+          <p:nvPr>
+            <p:ph type="body" idx="1"/>
+          </p:nvPr>
+        </p:nvSpPr>
+        <p:spPr/>
+        <p:txBody>
+          <a:bodyPr/>
+          <a:lstStyle/>
+          <a:p>
+            <a:r>
+              <a:rPr lang="en-US" dirty="0"/>
+              <a:t>Each worker thread uses the </a:t>
+            </a:r>
+            <a:r>
+              <a:rPr lang="en-US" sz="1200" kern="1200" dirty="0">
+                <a:solidFill>
+                  <a:schemeClr val="tx1"/>
+                </a:solidFill>
+                <a:effectLst/>
+                <a:latin typeface="+mn-lt"/>
+                <a:ea typeface="+mn-ea"/>
+                <a:cs typeface="+mn-cs"/>
+              </a:rPr>
+              <a:t>Downloader</a:t>
+            </a:r>
+            <a:r>
+              <a:rPr lang="en-US" dirty="0"/>
+              <a:t> class to request chunks from a seeder. The downloader sends the file key, offset, and length, then receives the bytes.</a:t>
+            </a:r>
+          </a:p>
+          <a:p>
+            <a:r>
+              <a:rPr lang="en-US" dirty="0"/>
+              <a:t>Downloader::</a:t>
+            </a:r>
+            <a:r>
+              <a:rPr lang="en-US" dirty="0" err="1"/>
+              <a:t>fetch_chunk_on_connection</a:t>
+            </a:r>
+            <a:r>
+              <a:rPr lang="en-US" dirty="0"/>
+              <a:t>() implements the chunk protocol.</a:t>
+            </a:r>
+          </a:p>
+          <a:p>
+            <a:r>
+              <a:rPr lang="en-US" dirty="0"/>
+              <a:t>Returns a </a:t>
+            </a:r>
+            <a:r>
+              <a:rPr lang="en-US" dirty="0" err="1"/>
+              <a:t>ChunkResult</a:t>
+            </a:r>
+            <a:r>
+              <a:rPr lang="en-US" dirty="0"/>
+              <a:t> with success flag, data, or error.</a:t>
+            </a:r>
+            <a:endParaRPr lang="en-PH" dirty="0"/>
+          </a:p>
+        </p:txBody>
+      </p:sp>
+      <p:sp>
+        <p:nvSpPr>
+          <p:cNvPr id="4" name="Slide Number Placeholder 3">
+            <a:extLst>
+              <a:ext uri="{FF2B5EF4-FFF2-40B4-BE49-F238E27FC236}">
+                <a16:creationId xmlns:a16="http://schemas.microsoft.com/office/drawing/2014/main" id="{4AA8F3AC-9F7F-5B5F-75AA-2E054C69A326}"/>
+              </a:ext>
+            </a:extLst>
+          </p:cNvPr>
+          <p:cNvSpPr>
+            <a:spLocks noGrp="1"/>
+          </p:cNvSpPr>
+          <p:nvPr>
+            <p:ph type="sldNum" sz="quarter" idx="5"/>
+          </p:nvPr>
+        </p:nvSpPr>
+        <p:spPr/>
+        <p:txBody>
+          <a:bodyPr/>
+          <a:lstStyle/>
+          <a:p>
+            <a:fld id="{ACDB7A15-2ED2-485D-9FD2-B8844FDCB40D}" type="slidenum">
+              <a:rPr lang="en-PH" smtClean="0"/>
+              <a:t>32</a:t>
+            </a:fld>
+            <a:endParaRPr lang="en-PH"/>
+          </a:p>
+        </p:txBody>
+      </p:sp>
+    </p:spTree>
+    <p:extLst>
+      <p:ext uri="{BB962C8B-B14F-4D97-AF65-F5344CB8AC3E}">
+        <p14:creationId xmlns:p14="http://schemas.microsoft.com/office/powerpoint/2010/main" val="2106922006"/>
+      </p:ext>
+    </p:extLst>
+  </p:cSld>
+  <p:clrMapOvr>
+    <a:masterClrMapping/>
+  </p:clrMapOvr>
+</p:notes>
 </file>
 
 <file path=ppt/slideLayouts/slideLayout1.xml><?xml version="1.0" encoding="utf-8"?>
@@ -7254,7 +10243,7 @@
               </a:lnSpc>
             </a:pPr>
             <a:r>
-              <a:rPr lang="en-US" sz="5199" b="1">
+              <a:rPr lang="en-US" sz="5199" b="1" dirty="0">
                 <a:solidFill>
                   <a:srgbClr val="000000"/>
                 </a:solidFill>
@@ -7272,7 +10261,7 @@
                 <a:spcPts val="7279"/>
               </a:lnSpc>
             </a:pPr>
-            <a:endParaRPr lang="en-US" sz="5199" b="1">
+            <a:endParaRPr lang="en-US" sz="5199" b="1" dirty="0">
               <a:solidFill>
                 <a:srgbClr val="000000"/>
               </a:solidFill>
@@ -7496,6 +10485,782 @@
 </p:sld>
 </file>
 
+<file path=ppt/slides/slide23.xml><?xml version="1.0" encoding="utf-8"?>
+<p:sld xmlns:a="http://schemas.openxmlformats.org/drawingml/2006/main" xmlns:r="http://schemas.openxmlformats.org/officeDocument/2006/relationships" xmlns:p="http://schemas.openxmlformats.org/presentationml/2006/main">
+  <p:cSld>
+    <p:spTree>
+      <p:nvGrpSpPr>
+        <p:cNvPr id="1" name="">
+          <a:extLst>
+            <a:ext uri="{FF2B5EF4-FFF2-40B4-BE49-F238E27FC236}">
+              <a16:creationId xmlns:a16="http://schemas.microsoft.com/office/drawing/2014/main" id="{0ABF6B29-1092-BCDE-9D37-D46DA9A8DB48}"/>
+            </a:ext>
+          </a:extLst>
+        </p:cNvPr>
+        <p:cNvGrpSpPr/>
+        <p:nvPr/>
+      </p:nvGrpSpPr>
+      <p:grpSpPr>
+        <a:xfrm>
+          <a:off x="0" y="0"/>
+          <a:ext cx="0" cy="0"/>
+          <a:chOff x="0" y="0"/>
+          <a:chExt cx="0" cy="0"/>
+        </a:xfrm>
+      </p:grpSpPr>
+      <p:sp>
+        <p:nvSpPr>
+          <p:cNvPr id="2" name="TextBox 2">
+            <a:extLst>
+              <a:ext uri="{FF2B5EF4-FFF2-40B4-BE49-F238E27FC236}">
+                <a16:creationId xmlns:a16="http://schemas.microsoft.com/office/drawing/2014/main" id="{B68208C3-333C-D0F1-EE05-E1F2E7AF83F1}"/>
+              </a:ext>
+            </a:extLst>
+          </p:cNvPr>
+          <p:cNvSpPr txBox="1"/>
+          <p:nvPr/>
+        </p:nvSpPr>
+        <p:spPr>
+          <a:xfrm>
+            <a:off x="6172200" y="495300"/>
+            <a:ext cx="11773748" cy="887095"/>
+          </a:xfrm>
+          <a:prstGeom prst="rect">
+            <a:avLst/>
+          </a:prstGeom>
+        </p:spPr>
+        <p:txBody>
+          <a:bodyPr lIns="0" tIns="0" rIns="0" bIns="0" rtlCol="0" anchor="t">
+            <a:spAutoFit/>
+          </a:bodyPr>
+          <a:lstStyle/>
+          <a:p>
+            <a:pPr algn="l">
+              <a:lnSpc>
+                <a:spcPts val="7279"/>
+              </a:lnSpc>
+            </a:pPr>
+            <a:r>
+              <a:rPr lang="en-US" sz="5199" b="1" dirty="0">
+                <a:solidFill>
+                  <a:srgbClr val="000000"/>
+                </a:solidFill>
+                <a:latin typeface="Canva Sans Bold"/>
+                <a:ea typeface="Canva Sans Bold"/>
+                <a:cs typeface="Canva Sans Bold"/>
+                <a:sym typeface="Canva Sans Bold"/>
+              </a:rPr>
+              <a:t>CLASS DIAGRAM</a:t>
+            </a:r>
+          </a:p>
+        </p:txBody>
+      </p:sp>
+      <p:pic>
+        <p:nvPicPr>
+          <p:cNvPr id="5" name="Picture 4">
+            <a:extLst>
+              <a:ext uri="{FF2B5EF4-FFF2-40B4-BE49-F238E27FC236}">
+                <a16:creationId xmlns:a16="http://schemas.microsoft.com/office/drawing/2014/main" id="{72417F87-7D04-0F30-FD45-16E2AC612CAB}"/>
+              </a:ext>
+            </a:extLst>
+          </p:cNvPr>
+          <p:cNvPicPr>
+            <a:picLocks noChangeAspect="1"/>
+          </p:cNvPicPr>
+          <p:nvPr/>
+        </p:nvPicPr>
+        <p:blipFill>
+          <a:blip r:embed="rId2" cstate="print">
+            <a:extLst>
+              <a:ext uri="{28A0092B-C50C-407E-A947-70E740481C1C}">
+                <a14:useLocalDpi xmlns:a14="http://schemas.microsoft.com/office/drawing/2010/main" val="0"/>
+              </a:ext>
+            </a:extLst>
+          </a:blip>
+          <a:stretch>
+            <a:fillRect/>
+          </a:stretch>
+        </p:blipFill>
+        <p:spPr>
+          <a:xfrm>
+            <a:off x="2705100" y="1382395"/>
+            <a:ext cx="12877800" cy="8517256"/>
+          </a:xfrm>
+          <a:prstGeom prst="rect">
+            <a:avLst/>
+          </a:prstGeom>
+        </p:spPr>
+      </p:pic>
+    </p:spTree>
+    <p:extLst>
+      <p:ext uri="{BB962C8B-B14F-4D97-AF65-F5344CB8AC3E}">
+        <p14:creationId xmlns:p14="http://schemas.microsoft.com/office/powerpoint/2010/main" val="1901544720"/>
+      </p:ext>
+    </p:extLst>
+  </p:cSld>
+  <p:clrMapOvr>
+    <a:masterClrMapping/>
+  </p:clrMapOvr>
+</p:sld>
+</file>
+
+<file path=ppt/slides/slide24.xml><?xml version="1.0" encoding="utf-8"?>
+<p:sld xmlns:a="http://schemas.openxmlformats.org/drawingml/2006/main" xmlns:r="http://schemas.openxmlformats.org/officeDocument/2006/relationships" xmlns:p="http://schemas.openxmlformats.org/presentationml/2006/main">
+  <p:cSld>
+    <p:spTree>
+      <p:nvGrpSpPr>
+        <p:cNvPr id="1" name=""/>
+        <p:cNvGrpSpPr/>
+        <p:nvPr/>
+      </p:nvGrpSpPr>
+      <p:grpSpPr>
+        <a:xfrm>
+          <a:off x="0" y="0"/>
+          <a:ext cx="0" cy="0"/>
+          <a:chOff x="0" y="0"/>
+          <a:chExt cx="0" cy="0"/>
+        </a:xfrm>
+      </p:grpSpPr>
+      <p:pic>
+        <p:nvPicPr>
+          <p:cNvPr id="3" name="Picture 2">
+            <a:extLst>
+              <a:ext uri="{FF2B5EF4-FFF2-40B4-BE49-F238E27FC236}">
+                <a16:creationId xmlns:a16="http://schemas.microsoft.com/office/drawing/2014/main" id="{F94D2594-1E81-6557-65BB-15CD60E448B3}"/>
+              </a:ext>
+            </a:extLst>
+          </p:cNvPr>
+          <p:cNvPicPr>
+            <a:picLocks noChangeAspect="1"/>
+          </p:cNvPicPr>
+          <p:nvPr/>
+        </p:nvPicPr>
+        <p:blipFill>
+          <a:blip r:embed="rId3"/>
+          <a:stretch>
+            <a:fillRect/>
+          </a:stretch>
+        </p:blipFill>
+        <p:spPr>
+          <a:xfrm>
+            <a:off x="3886200" y="1485900"/>
+            <a:ext cx="8189366" cy="8297732"/>
+          </a:xfrm>
+          <a:prstGeom prst="rect">
+            <a:avLst/>
+          </a:prstGeom>
+        </p:spPr>
+      </p:pic>
+      <p:sp>
+        <p:nvSpPr>
+          <p:cNvPr id="4" name="TextBox 3">
+            <a:extLst>
+              <a:ext uri="{FF2B5EF4-FFF2-40B4-BE49-F238E27FC236}">
+                <a16:creationId xmlns:a16="http://schemas.microsoft.com/office/drawing/2014/main" id="{F9A5D554-397A-0DA3-CC68-728900BAFE27}"/>
+              </a:ext>
+            </a:extLst>
+          </p:cNvPr>
+          <p:cNvSpPr txBox="1"/>
+          <p:nvPr/>
+        </p:nvSpPr>
+        <p:spPr>
+          <a:xfrm>
+            <a:off x="5638800" y="342900"/>
+            <a:ext cx="11773748" cy="884025"/>
+          </a:xfrm>
+          <a:prstGeom prst="rect">
+            <a:avLst/>
+          </a:prstGeom>
+        </p:spPr>
+        <p:txBody>
+          <a:bodyPr lIns="0" tIns="0" rIns="0" bIns="0" rtlCol="0" anchor="t">
+            <a:spAutoFit/>
+          </a:bodyPr>
+          <a:lstStyle/>
+          <a:p>
+            <a:pPr>
+              <a:lnSpc>
+                <a:spcPts val="7279"/>
+              </a:lnSpc>
+            </a:pPr>
+            <a:r>
+              <a:rPr lang="en-PH" sz="5400" dirty="0"/>
+              <a:t>User Starts the App</a:t>
+            </a:r>
+            <a:endParaRPr lang="en-US" sz="5199" b="1" dirty="0">
+              <a:solidFill>
+                <a:srgbClr val="000000"/>
+              </a:solidFill>
+              <a:latin typeface="Canva Sans Bold"/>
+              <a:ea typeface="Canva Sans Bold"/>
+              <a:cs typeface="Canva Sans Bold"/>
+              <a:sym typeface="Canva Sans Bold"/>
+            </a:endParaRPr>
+          </a:p>
+        </p:txBody>
+      </p:sp>
+    </p:spTree>
+    <p:extLst>
+      <p:ext uri="{BB962C8B-B14F-4D97-AF65-F5344CB8AC3E}">
+        <p14:creationId xmlns:p14="http://schemas.microsoft.com/office/powerpoint/2010/main" val="576641230"/>
+      </p:ext>
+    </p:extLst>
+  </p:cSld>
+  <p:clrMapOvr>
+    <a:masterClrMapping/>
+  </p:clrMapOvr>
+</p:sld>
+</file>
+
+<file path=ppt/slides/slide25.xml><?xml version="1.0" encoding="utf-8"?>
+<p:sld xmlns:a="http://schemas.openxmlformats.org/drawingml/2006/main" xmlns:r="http://schemas.openxmlformats.org/officeDocument/2006/relationships" xmlns:p="http://schemas.openxmlformats.org/presentationml/2006/main">
+  <p:cSld>
+    <p:spTree>
+      <p:nvGrpSpPr>
+        <p:cNvPr id="1" name="">
+          <a:extLst>
+            <a:ext uri="{FF2B5EF4-FFF2-40B4-BE49-F238E27FC236}">
+              <a16:creationId xmlns:a16="http://schemas.microsoft.com/office/drawing/2014/main" id="{8B8E1C00-932A-4DCD-327A-27552CFEDBF6}"/>
+            </a:ext>
+          </a:extLst>
+        </p:cNvPr>
+        <p:cNvGrpSpPr/>
+        <p:nvPr/>
+      </p:nvGrpSpPr>
+      <p:grpSpPr>
+        <a:xfrm>
+          <a:off x="0" y="0"/>
+          <a:ext cx="0" cy="0"/>
+          <a:chOff x="0" y="0"/>
+          <a:chExt cx="0" cy="0"/>
+        </a:xfrm>
+      </p:grpSpPr>
+      <p:sp>
+        <p:nvSpPr>
+          <p:cNvPr id="4" name="TextBox 3">
+            <a:extLst>
+              <a:ext uri="{FF2B5EF4-FFF2-40B4-BE49-F238E27FC236}">
+                <a16:creationId xmlns:a16="http://schemas.microsoft.com/office/drawing/2014/main" id="{9961422F-ED89-15F5-B1F5-2FBCAFEE239F}"/>
+              </a:ext>
+            </a:extLst>
+          </p:cNvPr>
+          <p:cNvSpPr txBox="1"/>
+          <p:nvPr/>
+        </p:nvSpPr>
+        <p:spPr>
+          <a:xfrm>
+            <a:off x="5638800" y="342900"/>
+            <a:ext cx="11773748" cy="884025"/>
+          </a:xfrm>
+          <a:prstGeom prst="rect">
+            <a:avLst/>
+          </a:prstGeom>
+        </p:spPr>
+        <p:txBody>
+          <a:bodyPr lIns="0" tIns="0" rIns="0" bIns="0" rtlCol="0" anchor="t">
+            <a:spAutoFit/>
+          </a:bodyPr>
+          <a:lstStyle/>
+          <a:p>
+            <a:pPr>
+              <a:lnSpc>
+                <a:spcPts val="7279"/>
+              </a:lnSpc>
+            </a:pPr>
+            <a:r>
+              <a:rPr lang="en-PH" sz="5400" dirty="0"/>
+              <a:t>Port Manager</a:t>
+            </a:r>
+            <a:endParaRPr lang="en-US" sz="5199" b="1" dirty="0">
+              <a:solidFill>
+                <a:srgbClr val="000000"/>
+              </a:solidFill>
+              <a:latin typeface="Canva Sans Bold"/>
+              <a:ea typeface="Canva Sans Bold"/>
+              <a:cs typeface="Canva Sans Bold"/>
+              <a:sym typeface="Canva Sans Bold"/>
+            </a:endParaRPr>
+          </a:p>
+        </p:txBody>
+      </p:sp>
+      <p:pic>
+        <p:nvPicPr>
+          <p:cNvPr id="5" name="Picture 4">
+            <a:extLst>
+              <a:ext uri="{FF2B5EF4-FFF2-40B4-BE49-F238E27FC236}">
+                <a16:creationId xmlns:a16="http://schemas.microsoft.com/office/drawing/2014/main" id="{731628EC-70F6-43EA-D1CE-EE84328E321D}"/>
+              </a:ext>
+            </a:extLst>
+          </p:cNvPr>
+          <p:cNvPicPr>
+            <a:picLocks noChangeAspect="1"/>
+          </p:cNvPicPr>
+          <p:nvPr/>
+        </p:nvPicPr>
+        <p:blipFill>
+          <a:blip r:embed="rId3"/>
+          <a:stretch>
+            <a:fillRect/>
+          </a:stretch>
+        </p:blipFill>
+        <p:spPr>
+          <a:xfrm>
+            <a:off x="4114800" y="1638300"/>
+            <a:ext cx="8077200" cy="8077200"/>
+          </a:xfrm>
+          <a:prstGeom prst="rect">
+            <a:avLst/>
+          </a:prstGeom>
+        </p:spPr>
+      </p:pic>
+    </p:spTree>
+    <p:extLst>
+      <p:ext uri="{BB962C8B-B14F-4D97-AF65-F5344CB8AC3E}">
+        <p14:creationId xmlns:p14="http://schemas.microsoft.com/office/powerpoint/2010/main" val="66437798"/>
+      </p:ext>
+    </p:extLst>
+  </p:cSld>
+  <p:clrMapOvr>
+    <a:masterClrMapping/>
+  </p:clrMapOvr>
+</p:sld>
+</file>
+
+<file path=ppt/slides/slide26.xml><?xml version="1.0" encoding="utf-8"?>
+<p:sld xmlns:a="http://schemas.openxmlformats.org/drawingml/2006/main" xmlns:r="http://schemas.openxmlformats.org/officeDocument/2006/relationships" xmlns:p="http://schemas.openxmlformats.org/presentationml/2006/main">
+  <p:cSld>
+    <p:spTree>
+      <p:nvGrpSpPr>
+        <p:cNvPr id="1" name="">
+          <a:extLst>
+            <a:ext uri="{FF2B5EF4-FFF2-40B4-BE49-F238E27FC236}">
+              <a16:creationId xmlns:a16="http://schemas.microsoft.com/office/drawing/2014/main" id="{5D7BDBFD-6310-02C4-DEE8-5EE6E3C461B5}"/>
+            </a:ext>
+          </a:extLst>
+        </p:cNvPr>
+        <p:cNvGrpSpPr/>
+        <p:nvPr/>
+      </p:nvGrpSpPr>
+      <p:grpSpPr>
+        <a:xfrm>
+          <a:off x="0" y="0"/>
+          <a:ext cx="0" cy="0"/>
+          <a:chOff x="0" y="0"/>
+          <a:chExt cx="0" cy="0"/>
+        </a:xfrm>
+      </p:grpSpPr>
+      <p:sp>
+        <p:nvSpPr>
+          <p:cNvPr id="4" name="TextBox 3">
+            <a:extLst>
+              <a:ext uri="{FF2B5EF4-FFF2-40B4-BE49-F238E27FC236}">
+                <a16:creationId xmlns:a16="http://schemas.microsoft.com/office/drawing/2014/main" id="{0F8BA9BC-FBCE-B65D-C41D-52F248552A9F}"/>
+              </a:ext>
+            </a:extLst>
+          </p:cNvPr>
+          <p:cNvSpPr txBox="1"/>
+          <p:nvPr/>
+        </p:nvSpPr>
+        <p:spPr>
+          <a:xfrm>
+            <a:off x="5638800" y="342900"/>
+            <a:ext cx="11773748" cy="884025"/>
+          </a:xfrm>
+          <a:prstGeom prst="rect">
+            <a:avLst/>
+          </a:prstGeom>
+        </p:spPr>
+        <p:txBody>
+          <a:bodyPr lIns="0" tIns="0" rIns="0" bIns="0" rtlCol="0" anchor="t">
+            <a:spAutoFit/>
+          </a:bodyPr>
+          <a:lstStyle/>
+          <a:p>
+            <a:pPr>
+              <a:lnSpc>
+                <a:spcPts val="7279"/>
+              </a:lnSpc>
+            </a:pPr>
+            <a:r>
+              <a:rPr lang="en-PH" sz="5400" dirty="0"/>
+              <a:t>Host Server Starts</a:t>
+            </a:r>
+            <a:endParaRPr lang="en-US" sz="5199" b="1" dirty="0">
+              <a:solidFill>
+                <a:srgbClr val="000000"/>
+              </a:solidFill>
+              <a:latin typeface="Canva Sans Bold"/>
+              <a:ea typeface="Canva Sans Bold"/>
+              <a:cs typeface="Canva Sans Bold"/>
+              <a:sym typeface="Canva Sans Bold"/>
+            </a:endParaRPr>
+          </a:p>
+        </p:txBody>
+      </p:sp>
+      <p:pic>
+        <p:nvPicPr>
+          <p:cNvPr id="3" name="Picture 2">
+            <a:extLst>
+              <a:ext uri="{FF2B5EF4-FFF2-40B4-BE49-F238E27FC236}">
+                <a16:creationId xmlns:a16="http://schemas.microsoft.com/office/drawing/2014/main" id="{C90F6228-C7E0-F623-EF16-CDA3EACC10EE}"/>
+              </a:ext>
+            </a:extLst>
+          </p:cNvPr>
+          <p:cNvPicPr>
+            <a:picLocks noChangeAspect="1"/>
+          </p:cNvPicPr>
+          <p:nvPr/>
+        </p:nvPicPr>
+        <p:blipFill>
+          <a:blip r:embed="rId3"/>
+          <a:stretch>
+            <a:fillRect/>
+          </a:stretch>
+        </p:blipFill>
+        <p:spPr>
+          <a:xfrm>
+            <a:off x="5029200" y="1409701"/>
+            <a:ext cx="6794642" cy="8534400"/>
+          </a:xfrm>
+          <a:prstGeom prst="rect">
+            <a:avLst/>
+          </a:prstGeom>
+        </p:spPr>
+      </p:pic>
+    </p:spTree>
+    <p:extLst>
+      <p:ext uri="{BB962C8B-B14F-4D97-AF65-F5344CB8AC3E}">
+        <p14:creationId xmlns:p14="http://schemas.microsoft.com/office/powerpoint/2010/main" val="3884105031"/>
+      </p:ext>
+    </p:extLst>
+  </p:cSld>
+  <p:clrMapOvr>
+    <a:masterClrMapping/>
+  </p:clrMapOvr>
+</p:sld>
+</file>
+
+<file path=ppt/slides/slide27.xml><?xml version="1.0" encoding="utf-8"?>
+<p:sld xmlns:a="http://schemas.openxmlformats.org/drawingml/2006/main" xmlns:r="http://schemas.openxmlformats.org/officeDocument/2006/relationships" xmlns:p="http://schemas.openxmlformats.org/presentationml/2006/main">
+  <p:cSld>
+    <p:spTree>
+      <p:nvGrpSpPr>
+        <p:cNvPr id="1" name="">
+          <a:extLst>
+            <a:ext uri="{FF2B5EF4-FFF2-40B4-BE49-F238E27FC236}">
+              <a16:creationId xmlns:a16="http://schemas.microsoft.com/office/drawing/2014/main" id="{A1FD62CC-AA43-3ED2-1343-9594A4F02E6A}"/>
+            </a:ext>
+          </a:extLst>
+        </p:cNvPr>
+        <p:cNvGrpSpPr/>
+        <p:nvPr/>
+      </p:nvGrpSpPr>
+      <p:grpSpPr>
+        <a:xfrm>
+          <a:off x="0" y="0"/>
+          <a:ext cx="0" cy="0"/>
+          <a:chOff x="0" y="0"/>
+          <a:chExt cx="0" cy="0"/>
+        </a:xfrm>
+      </p:grpSpPr>
+      <p:sp>
+        <p:nvSpPr>
+          <p:cNvPr id="4" name="TextBox 3">
+            <a:extLst>
+              <a:ext uri="{FF2B5EF4-FFF2-40B4-BE49-F238E27FC236}">
+                <a16:creationId xmlns:a16="http://schemas.microsoft.com/office/drawing/2014/main" id="{C7503718-1C34-97E0-7FE2-162AFE35C7FC}"/>
+              </a:ext>
+            </a:extLst>
+          </p:cNvPr>
+          <p:cNvSpPr txBox="1"/>
+          <p:nvPr/>
+        </p:nvSpPr>
+        <p:spPr>
+          <a:xfrm>
+            <a:off x="5638800" y="342900"/>
+            <a:ext cx="11773748" cy="884025"/>
+          </a:xfrm>
+          <a:prstGeom prst="rect">
+            <a:avLst/>
+          </a:prstGeom>
+        </p:spPr>
+        <p:txBody>
+          <a:bodyPr lIns="0" tIns="0" rIns="0" bIns="0" rtlCol="0" anchor="t">
+            <a:spAutoFit/>
+          </a:bodyPr>
+          <a:lstStyle/>
+          <a:p>
+            <a:pPr>
+              <a:lnSpc>
+                <a:spcPts val="7279"/>
+              </a:lnSpc>
+            </a:pPr>
+            <a:r>
+              <a:rPr lang="en-PH" sz="5400" dirty="0"/>
+              <a:t>Menu Interaction</a:t>
+            </a:r>
+            <a:endParaRPr lang="en-US" sz="5199" b="1" dirty="0">
+              <a:solidFill>
+                <a:srgbClr val="000000"/>
+              </a:solidFill>
+              <a:latin typeface="Canva Sans Bold"/>
+              <a:ea typeface="Canva Sans Bold"/>
+              <a:cs typeface="Canva Sans Bold"/>
+              <a:sym typeface="Canva Sans Bold"/>
+            </a:endParaRPr>
+          </a:p>
+        </p:txBody>
+      </p:sp>
+      <p:pic>
+        <p:nvPicPr>
+          <p:cNvPr id="3" name="Picture 2">
+            <a:extLst>
+              <a:ext uri="{FF2B5EF4-FFF2-40B4-BE49-F238E27FC236}">
+                <a16:creationId xmlns:a16="http://schemas.microsoft.com/office/drawing/2014/main" id="{B95AA77B-575C-59E0-CFF4-32F115BADFB2}"/>
+              </a:ext>
+            </a:extLst>
+          </p:cNvPr>
+          <p:cNvPicPr>
+            <a:picLocks noChangeAspect="1"/>
+          </p:cNvPicPr>
+          <p:nvPr/>
+        </p:nvPicPr>
+        <p:blipFill>
+          <a:blip r:embed="rId3"/>
+          <a:srcRect t="53571" r="37198"/>
+          <a:stretch>
+            <a:fillRect/>
+          </a:stretch>
+        </p:blipFill>
+        <p:spPr>
+          <a:xfrm>
+            <a:off x="3810000" y="1790700"/>
+            <a:ext cx="8153400" cy="7571016"/>
+          </a:xfrm>
+          <a:prstGeom prst="rect">
+            <a:avLst/>
+          </a:prstGeom>
+        </p:spPr>
+      </p:pic>
+    </p:spTree>
+    <p:extLst>
+      <p:ext uri="{BB962C8B-B14F-4D97-AF65-F5344CB8AC3E}">
+        <p14:creationId xmlns:p14="http://schemas.microsoft.com/office/powerpoint/2010/main" val="3470132073"/>
+      </p:ext>
+    </p:extLst>
+  </p:cSld>
+  <p:clrMapOvr>
+    <a:masterClrMapping/>
+  </p:clrMapOvr>
+</p:sld>
+</file>
+
+<file path=ppt/slides/slide28.xml><?xml version="1.0" encoding="utf-8"?>
+<p:sld xmlns:a="http://schemas.openxmlformats.org/drawingml/2006/main" xmlns:r="http://schemas.openxmlformats.org/officeDocument/2006/relationships" xmlns:p="http://schemas.openxmlformats.org/presentationml/2006/main">
+  <p:cSld>
+    <p:spTree>
+      <p:nvGrpSpPr>
+        <p:cNvPr id="1" name="">
+          <a:extLst>
+            <a:ext uri="{FF2B5EF4-FFF2-40B4-BE49-F238E27FC236}">
+              <a16:creationId xmlns:a16="http://schemas.microsoft.com/office/drawing/2014/main" id="{D7667324-9476-38CA-F969-F6E2B8073A51}"/>
+            </a:ext>
+          </a:extLst>
+        </p:cNvPr>
+        <p:cNvGrpSpPr/>
+        <p:nvPr/>
+      </p:nvGrpSpPr>
+      <p:grpSpPr>
+        <a:xfrm>
+          <a:off x="0" y="0"/>
+          <a:ext cx="0" cy="0"/>
+          <a:chOff x="0" y="0"/>
+          <a:chExt cx="0" cy="0"/>
+        </a:xfrm>
+      </p:grpSpPr>
+      <p:sp>
+        <p:nvSpPr>
+          <p:cNvPr id="4" name="TextBox 3">
+            <a:extLst>
+              <a:ext uri="{FF2B5EF4-FFF2-40B4-BE49-F238E27FC236}">
+                <a16:creationId xmlns:a16="http://schemas.microsoft.com/office/drawing/2014/main" id="{3D3FB7AB-7F66-48C6-5197-980492391B4B}"/>
+              </a:ext>
+            </a:extLst>
+          </p:cNvPr>
+          <p:cNvSpPr txBox="1"/>
+          <p:nvPr/>
+        </p:nvSpPr>
+        <p:spPr>
+          <a:xfrm>
+            <a:off x="7086600" y="419100"/>
+            <a:ext cx="11773748" cy="830997"/>
+          </a:xfrm>
+          <a:prstGeom prst="rect">
+            <a:avLst/>
+          </a:prstGeom>
+        </p:spPr>
+        <p:txBody>
+          <a:bodyPr lIns="0" tIns="0" rIns="0" bIns="0" rtlCol="0" anchor="t">
+            <a:spAutoFit/>
+          </a:bodyPr>
+          <a:lstStyle/>
+          <a:p>
+            <a:r>
+              <a:rPr lang="en-PH" sz="5400" b="1" dirty="0"/>
+              <a:t>Discovering Files</a:t>
+            </a:r>
+            <a:endParaRPr lang="en-PH" sz="5400" b="1" dirty="0">
+              <a:effectLst/>
+            </a:endParaRPr>
+          </a:p>
+        </p:txBody>
+      </p:sp>
+      <p:pic>
+        <p:nvPicPr>
+          <p:cNvPr id="5" name="Picture 4">
+            <a:extLst>
+              <a:ext uri="{FF2B5EF4-FFF2-40B4-BE49-F238E27FC236}">
+                <a16:creationId xmlns:a16="http://schemas.microsoft.com/office/drawing/2014/main" id="{A1CADDA9-35DA-124A-B834-AFF82D2FDF7A}"/>
+              </a:ext>
+            </a:extLst>
+          </p:cNvPr>
+          <p:cNvPicPr>
+            <a:picLocks noChangeAspect="1"/>
+          </p:cNvPicPr>
+          <p:nvPr/>
+        </p:nvPicPr>
+        <p:blipFill>
+          <a:blip r:embed="rId3"/>
+          <a:stretch>
+            <a:fillRect/>
+          </a:stretch>
+        </p:blipFill>
+        <p:spPr>
+          <a:xfrm>
+            <a:off x="3962400" y="1485900"/>
+            <a:ext cx="7970601" cy="8359140"/>
+          </a:xfrm>
+          <a:prstGeom prst="rect">
+            <a:avLst/>
+          </a:prstGeom>
+        </p:spPr>
+      </p:pic>
+    </p:spTree>
+    <p:extLst>
+      <p:ext uri="{BB962C8B-B14F-4D97-AF65-F5344CB8AC3E}">
+        <p14:creationId xmlns:p14="http://schemas.microsoft.com/office/powerpoint/2010/main" val="2281693379"/>
+      </p:ext>
+    </p:extLst>
+  </p:cSld>
+  <p:clrMapOvr>
+    <a:masterClrMapping/>
+  </p:clrMapOvr>
+</p:sld>
+</file>
+
+<file path=ppt/slides/slide29.xml><?xml version="1.0" encoding="utf-8"?>
+<p:sld xmlns:a="http://schemas.openxmlformats.org/drawingml/2006/main" xmlns:r="http://schemas.openxmlformats.org/officeDocument/2006/relationships" xmlns:p="http://schemas.openxmlformats.org/presentationml/2006/main">
+  <p:cSld>
+    <p:spTree>
+      <p:nvGrpSpPr>
+        <p:cNvPr id="1" name="">
+          <a:extLst>
+            <a:ext uri="{FF2B5EF4-FFF2-40B4-BE49-F238E27FC236}">
+              <a16:creationId xmlns:a16="http://schemas.microsoft.com/office/drawing/2014/main" id="{17F5C24E-4677-1E73-BA58-67ECE30A1CF2}"/>
+            </a:ext>
+          </a:extLst>
+        </p:cNvPr>
+        <p:cNvGrpSpPr/>
+        <p:nvPr/>
+      </p:nvGrpSpPr>
+      <p:grpSpPr>
+        <a:xfrm>
+          <a:off x="0" y="0"/>
+          <a:ext cx="0" cy="0"/>
+          <a:chOff x="0" y="0"/>
+          <a:chExt cx="0" cy="0"/>
+        </a:xfrm>
+      </p:grpSpPr>
+      <p:sp>
+        <p:nvSpPr>
+          <p:cNvPr id="4" name="TextBox 3">
+            <a:extLst>
+              <a:ext uri="{FF2B5EF4-FFF2-40B4-BE49-F238E27FC236}">
+                <a16:creationId xmlns:a16="http://schemas.microsoft.com/office/drawing/2014/main" id="{B3D51119-C9FD-6DE5-109C-ECCEF29EB2C3}"/>
+              </a:ext>
+            </a:extLst>
+          </p:cNvPr>
+          <p:cNvSpPr txBox="1"/>
+          <p:nvPr/>
+        </p:nvSpPr>
+        <p:spPr>
+          <a:xfrm>
+            <a:off x="7086600" y="419100"/>
+            <a:ext cx="11773748" cy="830997"/>
+          </a:xfrm>
+          <a:prstGeom prst="rect">
+            <a:avLst/>
+          </a:prstGeom>
+        </p:spPr>
+        <p:txBody>
+          <a:bodyPr lIns="0" tIns="0" rIns="0" bIns="0" rtlCol="0" anchor="t">
+            <a:spAutoFit/>
+          </a:bodyPr>
+          <a:lstStyle/>
+          <a:p>
+            <a:r>
+              <a:rPr lang="en-PH" sz="5400" dirty="0"/>
+              <a:t>Network File</a:t>
+            </a:r>
+            <a:endParaRPr lang="en-PH" sz="5400" b="1" dirty="0">
+              <a:effectLst/>
+            </a:endParaRPr>
+          </a:p>
+        </p:txBody>
+      </p:sp>
+      <p:pic>
+        <p:nvPicPr>
+          <p:cNvPr id="3" name="Picture 2">
+            <a:extLst>
+              <a:ext uri="{FF2B5EF4-FFF2-40B4-BE49-F238E27FC236}">
+                <a16:creationId xmlns:a16="http://schemas.microsoft.com/office/drawing/2014/main" id="{8A38EB7F-36EA-4000-7C38-E75B6D92A539}"/>
+              </a:ext>
+            </a:extLst>
+          </p:cNvPr>
+          <p:cNvPicPr>
+            <a:picLocks noChangeAspect="1"/>
+          </p:cNvPicPr>
+          <p:nvPr/>
+        </p:nvPicPr>
+        <p:blipFill>
+          <a:blip r:embed="rId3"/>
+          <a:stretch>
+            <a:fillRect/>
+          </a:stretch>
+        </p:blipFill>
+        <p:spPr>
+          <a:xfrm>
+            <a:off x="-15240" y="2781300"/>
+            <a:ext cx="15358536" cy="4487883"/>
+          </a:xfrm>
+          <a:prstGeom prst="rect">
+            <a:avLst/>
+          </a:prstGeom>
+        </p:spPr>
+      </p:pic>
+    </p:spTree>
+    <p:extLst>
+      <p:ext uri="{BB962C8B-B14F-4D97-AF65-F5344CB8AC3E}">
+        <p14:creationId xmlns:p14="http://schemas.microsoft.com/office/powerpoint/2010/main" val="3279256520"/>
+      </p:ext>
+    </p:extLst>
+  </p:cSld>
+  <p:clrMapOvr>
+    <a:masterClrMapping/>
+  </p:clrMapOvr>
+</p:sld>
+</file>
+
 <file path=ppt/slides/slide3.xml><?xml version="1.0" encoding="utf-8"?>
 <p:sld xmlns:a="http://schemas.openxmlformats.org/drawingml/2006/main" xmlns:r="http://schemas.openxmlformats.org/officeDocument/2006/relationships" xmlns:p="http://schemas.openxmlformats.org/presentationml/2006/main">
   <p:cSld>
@@ -7779,6 +11544,733 @@
         </p:txBody>
       </p:sp>
     </p:spTree>
+  </p:cSld>
+  <p:clrMapOvr>
+    <a:masterClrMapping/>
+  </p:clrMapOvr>
+</p:sld>
+</file>
+
+<file path=ppt/slides/slide30.xml><?xml version="1.0" encoding="utf-8"?>
+<p:sld xmlns:a="http://schemas.openxmlformats.org/drawingml/2006/main" xmlns:r="http://schemas.openxmlformats.org/officeDocument/2006/relationships" xmlns:p="http://schemas.openxmlformats.org/presentationml/2006/main">
+  <p:cSld>
+    <p:spTree>
+      <p:nvGrpSpPr>
+        <p:cNvPr id="1" name="">
+          <a:extLst>
+            <a:ext uri="{FF2B5EF4-FFF2-40B4-BE49-F238E27FC236}">
+              <a16:creationId xmlns:a16="http://schemas.microsoft.com/office/drawing/2014/main" id="{1F3A26F5-1575-7053-2F6F-C45D6D4CE05D}"/>
+            </a:ext>
+          </a:extLst>
+        </p:cNvPr>
+        <p:cNvGrpSpPr/>
+        <p:nvPr/>
+      </p:nvGrpSpPr>
+      <p:grpSpPr>
+        <a:xfrm>
+          <a:off x="0" y="0"/>
+          <a:ext cx="0" cy="0"/>
+          <a:chOff x="0" y="0"/>
+          <a:chExt cx="0" cy="0"/>
+        </a:xfrm>
+      </p:grpSpPr>
+      <p:sp>
+        <p:nvSpPr>
+          <p:cNvPr id="4" name="TextBox 3">
+            <a:extLst>
+              <a:ext uri="{FF2B5EF4-FFF2-40B4-BE49-F238E27FC236}">
+                <a16:creationId xmlns:a16="http://schemas.microsoft.com/office/drawing/2014/main" id="{691916BE-340A-D586-AF40-AC11C8EA7E8D}"/>
+              </a:ext>
+            </a:extLst>
+          </p:cNvPr>
+          <p:cNvSpPr txBox="1"/>
+          <p:nvPr/>
+        </p:nvSpPr>
+        <p:spPr>
+          <a:xfrm>
+            <a:off x="7086600" y="419100"/>
+            <a:ext cx="11773748" cy="830997"/>
+          </a:xfrm>
+          <a:prstGeom prst="rect">
+            <a:avLst/>
+          </a:prstGeom>
+        </p:spPr>
+        <p:txBody>
+          <a:bodyPr lIns="0" tIns="0" rIns="0" bIns="0" rtlCol="0" anchor="t">
+            <a:spAutoFit/>
+          </a:bodyPr>
+          <a:lstStyle/>
+          <a:p>
+            <a:r>
+              <a:rPr lang="en-PH" sz="5400" dirty="0"/>
+              <a:t>Resolving Seeders</a:t>
+            </a:r>
+            <a:endParaRPr lang="en-PH" sz="5400" b="1" dirty="0">
+              <a:effectLst/>
+            </a:endParaRPr>
+          </a:p>
+        </p:txBody>
+      </p:sp>
+      <p:pic>
+        <p:nvPicPr>
+          <p:cNvPr id="7" name="Picture 6">
+            <a:extLst>
+              <a:ext uri="{FF2B5EF4-FFF2-40B4-BE49-F238E27FC236}">
+                <a16:creationId xmlns:a16="http://schemas.microsoft.com/office/drawing/2014/main" id="{C49BD643-124B-4993-192B-AD4C87CF3E00}"/>
+              </a:ext>
+            </a:extLst>
+          </p:cNvPr>
+          <p:cNvPicPr>
+            <a:picLocks noChangeAspect="1"/>
+          </p:cNvPicPr>
+          <p:nvPr/>
+        </p:nvPicPr>
+        <p:blipFill>
+          <a:blip r:embed="rId3"/>
+          <a:stretch>
+            <a:fillRect/>
+          </a:stretch>
+        </p:blipFill>
+        <p:spPr>
+          <a:xfrm>
+            <a:off x="3276599" y="1342494"/>
+            <a:ext cx="10864865" cy="8296806"/>
+          </a:xfrm>
+          <a:prstGeom prst="rect">
+            <a:avLst/>
+          </a:prstGeom>
+        </p:spPr>
+      </p:pic>
+    </p:spTree>
+    <p:extLst>
+      <p:ext uri="{BB962C8B-B14F-4D97-AF65-F5344CB8AC3E}">
+        <p14:creationId xmlns:p14="http://schemas.microsoft.com/office/powerpoint/2010/main" val="1895628449"/>
+      </p:ext>
+    </p:extLst>
+  </p:cSld>
+  <p:clrMapOvr>
+    <a:masterClrMapping/>
+  </p:clrMapOvr>
+</p:sld>
+</file>
+
+<file path=ppt/slides/slide31.xml><?xml version="1.0" encoding="utf-8"?>
+<p:sld xmlns:a="http://schemas.openxmlformats.org/drawingml/2006/main" xmlns:r="http://schemas.openxmlformats.org/officeDocument/2006/relationships" xmlns:p="http://schemas.openxmlformats.org/presentationml/2006/main">
+  <p:cSld>
+    <p:spTree>
+      <p:nvGrpSpPr>
+        <p:cNvPr id="1" name="">
+          <a:extLst>
+            <a:ext uri="{FF2B5EF4-FFF2-40B4-BE49-F238E27FC236}">
+              <a16:creationId xmlns:a16="http://schemas.microsoft.com/office/drawing/2014/main" id="{9928DEFC-8D2F-9EA0-C5BF-393045621C30}"/>
+            </a:ext>
+          </a:extLst>
+        </p:cNvPr>
+        <p:cNvGrpSpPr/>
+        <p:nvPr/>
+      </p:nvGrpSpPr>
+      <p:grpSpPr>
+        <a:xfrm>
+          <a:off x="0" y="0"/>
+          <a:ext cx="0" cy="0"/>
+          <a:chOff x="0" y="0"/>
+          <a:chExt cx="0" cy="0"/>
+        </a:xfrm>
+      </p:grpSpPr>
+      <p:sp>
+        <p:nvSpPr>
+          <p:cNvPr id="4" name="TextBox 3">
+            <a:extLst>
+              <a:ext uri="{FF2B5EF4-FFF2-40B4-BE49-F238E27FC236}">
+                <a16:creationId xmlns:a16="http://schemas.microsoft.com/office/drawing/2014/main" id="{E2CA4879-2C2D-C667-B42E-33D15E420E99}"/>
+              </a:ext>
+            </a:extLst>
+          </p:cNvPr>
+          <p:cNvSpPr txBox="1"/>
+          <p:nvPr/>
+        </p:nvSpPr>
+        <p:spPr>
+          <a:xfrm>
+            <a:off x="4800600" y="495300"/>
+            <a:ext cx="11773748" cy="830997"/>
+          </a:xfrm>
+          <a:prstGeom prst="rect">
+            <a:avLst/>
+          </a:prstGeom>
+        </p:spPr>
+        <p:txBody>
+          <a:bodyPr lIns="0" tIns="0" rIns="0" bIns="0" rtlCol="0" anchor="t">
+            <a:spAutoFit/>
+          </a:bodyPr>
+          <a:lstStyle/>
+          <a:p>
+            <a:r>
+              <a:rPr lang="en-US" sz="5400" dirty="0"/>
+              <a:t>Download Manager Creates a Job</a:t>
+            </a:r>
+            <a:endParaRPr lang="en-PH" sz="5400" b="1" dirty="0">
+              <a:effectLst/>
+            </a:endParaRPr>
+          </a:p>
+        </p:txBody>
+      </p:sp>
+      <p:pic>
+        <p:nvPicPr>
+          <p:cNvPr id="3" name="Picture 2">
+            <a:extLst>
+              <a:ext uri="{FF2B5EF4-FFF2-40B4-BE49-F238E27FC236}">
+                <a16:creationId xmlns:a16="http://schemas.microsoft.com/office/drawing/2014/main" id="{61A3C223-8DCD-3F2F-DE6F-F420C122D14F}"/>
+              </a:ext>
+            </a:extLst>
+          </p:cNvPr>
+          <p:cNvPicPr>
+            <a:picLocks noChangeAspect="1"/>
+          </p:cNvPicPr>
+          <p:nvPr/>
+        </p:nvPicPr>
+        <p:blipFill>
+          <a:blip r:embed="rId3"/>
+          <a:stretch>
+            <a:fillRect/>
+          </a:stretch>
+        </p:blipFill>
+        <p:spPr>
+          <a:xfrm>
+            <a:off x="3810000" y="1485900"/>
+            <a:ext cx="7991909" cy="8578471"/>
+          </a:xfrm>
+          <a:prstGeom prst="rect">
+            <a:avLst/>
+          </a:prstGeom>
+        </p:spPr>
+      </p:pic>
+    </p:spTree>
+    <p:extLst>
+      <p:ext uri="{BB962C8B-B14F-4D97-AF65-F5344CB8AC3E}">
+        <p14:creationId xmlns:p14="http://schemas.microsoft.com/office/powerpoint/2010/main" val="1172077812"/>
+      </p:ext>
+    </p:extLst>
+  </p:cSld>
+  <p:clrMapOvr>
+    <a:masterClrMapping/>
+  </p:clrMapOvr>
+</p:sld>
+</file>
+
+<file path=ppt/slides/slide32.xml><?xml version="1.0" encoding="utf-8"?>
+<p:sld xmlns:a="http://schemas.openxmlformats.org/drawingml/2006/main" xmlns:r="http://schemas.openxmlformats.org/officeDocument/2006/relationships" xmlns:p="http://schemas.openxmlformats.org/presentationml/2006/main">
+  <p:cSld>
+    <p:spTree>
+      <p:nvGrpSpPr>
+        <p:cNvPr id="1" name="">
+          <a:extLst>
+            <a:ext uri="{FF2B5EF4-FFF2-40B4-BE49-F238E27FC236}">
+              <a16:creationId xmlns:a16="http://schemas.microsoft.com/office/drawing/2014/main" id="{E409D013-CC6C-7EBD-8D2D-DFB457F85C45}"/>
+            </a:ext>
+          </a:extLst>
+        </p:cNvPr>
+        <p:cNvGrpSpPr/>
+        <p:nvPr/>
+      </p:nvGrpSpPr>
+      <p:grpSpPr>
+        <a:xfrm>
+          <a:off x="0" y="0"/>
+          <a:ext cx="0" cy="0"/>
+          <a:chOff x="0" y="0"/>
+          <a:chExt cx="0" cy="0"/>
+        </a:xfrm>
+      </p:grpSpPr>
+      <p:sp>
+        <p:nvSpPr>
+          <p:cNvPr id="4" name="TextBox 3">
+            <a:extLst>
+              <a:ext uri="{FF2B5EF4-FFF2-40B4-BE49-F238E27FC236}">
+                <a16:creationId xmlns:a16="http://schemas.microsoft.com/office/drawing/2014/main" id="{68DB8765-7B78-3EEA-3252-F5CAD6681A68}"/>
+              </a:ext>
+            </a:extLst>
+          </p:cNvPr>
+          <p:cNvSpPr txBox="1"/>
+          <p:nvPr/>
+        </p:nvSpPr>
+        <p:spPr>
+          <a:xfrm>
+            <a:off x="4800600" y="495300"/>
+            <a:ext cx="11773748" cy="830997"/>
+          </a:xfrm>
+          <a:prstGeom prst="rect">
+            <a:avLst/>
+          </a:prstGeom>
+        </p:spPr>
+        <p:txBody>
+          <a:bodyPr lIns="0" tIns="0" rIns="0" bIns="0" rtlCol="0" anchor="t">
+            <a:spAutoFit/>
+          </a:bodyPr>
+          <a:lstStyle/>
+          <a:p>
+            <a:r>
+              <a:rPr lang="en-PH" sz="5400" dirty="0"/>
+              <a:t>Downloader Fetches Chunks</a:t>
+            </a:r>
+            <a:endParaRPr lang="en-PH" sz="5400" b="1" dirty="0">
+              <a:effectLst/>
+            </a:endParaRPr>
+          </a:p>
+        </p:txBody>
+      </p:sp>
+      <p:pic>
+        <p:nvPicPr>
+          <p:cNvPr id="5" name="Picture 4">
+            <a:extLst>
+              <a:ext uri="{FF2B5EF4-FFF2-40B4-BE49-F238E27FC236}">
+                <a16:creationId xmlns:a16="http://schemas.microsoft.com/office/drawing/2014/main" id="{4A24AA73-DEB7-4830-816D-EE80CA99D85C}"/>
+              </a:ext>
+            </a:extLst>
+          </p:cNvPr>
+          <p:cNvPicPr>
+            <a:picLocks noChangeAspect="1"/>
+          </p:cNvPicPr>
+          <p:nvPr/>
+        </p:nvPicPr>
+        <p:blipFill>
+          <a:blip r:embed="rId3"/>
+          <a:stretch>
+            <a:fillRect/>
+          </a:stretch>
+        </p:blipFill>
+        <p:spPr>
+          <a:xfrm>
+            <a:off x="4191000" y="1562100"/>
+            <a:ext cx="8463282" cy="7302001"/>
+          </a:xfrm>
+          <a:prstGeom prst="rect">
+            <a:avLst/>
+          </a:prstGeom>
+        </p:spPr>
+      </p:pic>
+    </p:spTree>
+    <p:extLst>
+      <p:ext uri="{BB962C8B-B14F-4D97-AF65-F5344CB8AC3E}">
+        <p14:creationId xmlns:p14="http://schemas.microsoft.com/office/powerpoint/2010/main" val="80804704"/>
+      </p:ext>
+    </p:extLst>
+  </p:cSld>
+  <p:clrMapOvr>
+    <a:masterClrMapping/>
+  </p:clrMapOvr>
+</p:sld>
+</file>
+
+<file path=ppt/slides/slide33.xml><?xml version="1.0" encoding="utf-8"?>
+<p:sld xmlns:a="http://schemas.openxmlformats.org/drawingml/2006/main" xmlns:r="http://schemas.openxmlformats.org/officeDocument/2006/relationships" xmlns:p="http://schemas.openxmlformats.org/presentationml/2006/main">
+  <p:cSld>
+    <p:spTree>
+      <p:nvGrpSpPr>
+        <p:cNvPr id="1" name="">
+          <a:extLst>
+            <a:ext uri="{FF2B5EF4-FFF2-40B4-BE49-F238E27FC236}">
+              <a16:creationId xmlns:a16="http://schemas.microsoft.com/office/drawing/2014/main" id="{1832A100-0A2B-A590-22F0-DA94F1507A6B}"/>
+            </a:ext>
+          </a:extLst>
+        </p:cNvPr>
+        <p:cNvGrpSpPr/>
+        <p:nvPr/>
+      </p:nvGrpSpPr>
+      <p:grpSpPr>
+        <a:xfrm>
+          <a:off x="0" y="0"/>
+          <a:ext cx="0" cy="0"/>
+          <a:chOff x="0" y="0"/>
+          <a:chExt cx="0" cy="0"/>
+        </a:xfrm>
+      </p:grpSpPr>
+      <p:sp>
+        <p:nvSpPr>
+          <p:cNvPr id="4" name="TextBox 3">
+            <a:extLst>
+              <a:ext uri="{FF2B5EF4-FFF2-40B4-BE49-F238E27FC236}">
+                <a16:creationId xmlns:a16="http://schemas.microsoft.com/office/drawing/2014/main" id="{F7CB4987-E17C-C1D6-111B-8FE087B83E09}"/>
+              </a:ext>
+            </a:extLst>
+          </p:cNvPr>
+          <p:cNvSpPr txBox="1"/>
+          <p:nvPr/>
+        </p:nvSpPr>
+        <p:spPr>
+          <a:xfrm>
+            <a:off x="7315200" y="571500"/>
+            <a:ext cx="11773748" cy="830997"/>
+          </a:xfrm>
+          <a:prstGeom prst="rect">
+            <a:avLst/>
+          </a:prstGeom>
+        </p:spPr>
+        <p:txBody>
+          <a:bodyPr lIns="0" tIns="0" rIns="0" bIns="0" rtlCol="0" anchor="t">
+            <a:spAutoFit/>
+          </a:bodyPr>
+          <a:lstStyle/>
+          <a:p>
+            <a:r>
+              <a:rPr lang="en-PH" sz="5400" dirty="0" err="1"/>
+              <a:t>ChunkResult</a:t>
+            </a:r>
+            <a:endParaRPr lang="en-PH" sz="5400" b="1" dirty="0">
+              <a:effectLst/>
+            </a:endParaRPr>
+          </a:p>
+        </p:txBody>
+      </p:sp>
+      <p:pic>
+        <p:nvPicPr>
+          <p:cNvPr id="3" name="Picture 2">
+            <a:extLst>
+              <a:ext uri="{FF2B5EF4-FFF2-40B4-BE49-F238E27FC236}">
+                <a16:creationId xmlns:a16="http://schemas.microsoft.com/office/drawing/2014/main" id="{DB795AA0-F27A-6E74-9C62-9F52AAB07A63}"/>
+              </a:ext>
+            </a:extLst>
+          </p:cNvPr>
+          <p:cNvPicPr>
+            <a:picLocks noChangeAspect="1"/>
+          </p:cNvPicPr>
+          <p:nvPr/>
+        </p:nvPicPr>
+        <p:blipFill>
+          <a:blip r:embed="rId3"/>
+          <a:stretch>
+            <a:fillRect/>
+          </a:stretch>
+        </p:blipFill>
+        <p:spPr>
+          <a:xfrm>
+            <a:off x="3733800" y="3057639"/>
+            <a:ext cx="10351292" cy="3990861"/>
+          </a:xfrm>
+          <a:prstGeom prst="rect">
+            <a:avLst/>
+          </a:prstGeom>
+        </p:spPr>
+      </p:pic>
+    </p:spTree>
+    <p:extLst>
+      <p:ext uri="{BB962C8B-B14F-4D97-AF65-F5344CB8AC3E}">
+        <p14:creationId xmlns:p14="http://schemas.microsoft.com/office/powerpoint/2010/main" val="1178983624"/>
+      </p:ext>
+    </p:extLst>
+  </p:cSld>
+  <p:clrMapOvr>
+    <a:masterClrMapping/>
+  </p:clrMapOvr>
+</p:sld>
+</file>
+
+<file path=ppt/slides/slide34.xml><?xml version="1.0" encoding="utf-8"?>
+<p:sld xmlns:a="http://schemas.openxmlformats.org/drawingml/2006/main" xmlns:r="http://schemas.openxmlformats.org/officeDocument/2006/relationships" xmlns:p="http://schemas.openxmlformats.org/presentationml/2006/main">
+  <p:cSld>
+    <p:spTree>
+      <p:nvGrpSpPr>
+        <p:cNvPr id="1" name="">
+          <a:extLst>
+            <a:ext uri="{FF2B5EF4-FFF2-40B4-BE49-F238E27FC236}">
+              <a16:creationId xmlns:a16="http://schemas.microsoft.com/office/drawing/2014/main" id="{86B22840-3C9E-E509-0A46-84181CE4C264}"/>
+            </a:ext>
+          </a:extLst>
+        </p:cNvPr>
+        <p:cNvGrpSpPr/>
+        <p:nvPr/>
+      </p:nvGrpSpPr>
+      <p:grpSpPr>
+        <a:xfrm>
+          <a:off x="0" y="0"/>
+          <a:ext cx="0" cy="0"/>
+          <a:chOff x="0" y="0"/>
+          <a:chExt cx="0" cy="0"/>
+        </a:xfrm>
+      </p:grpSpPr>
+      <p:sp>
+        <p:nvSpPr>
+          <p:cNvPr id="4" name="TextBox 3">
+            <a:extLst>
+              <a:ext uri="{FF2B5EF4-FFF2-40B4-BE49-F238E27FC236}">
+                <a16:creationId xmlns:a16="http://schemas.microsoft.com/office/drawing/2014/main" id="{B27157DF-6B4E-14C7-7FD8-24E6E5C4280D}"/>
+              </a:ext>
+            </a:extLst>
+          </p:cNvPr>
+          <p:cNvSpPr txBox="1"/>
+          <p:nvPr/>
+        </p:nvSpPr>
+        <p:spPr>
+          <a:xfrm>
+            <a:off x="7315200" y="571500"/>
+            <a:ext cx="11773748" cy="830997"/>
+          </a:xfrm>
+          <a:prstGeom prst="rect">
+            <a:avLst/>
+          </a:prstGeom>
+        </p:spPr>
+        <p:txBody>
+          <a:bodyPr lIns="0" tIns="0" rIns="0" bIns="0" rtlCol="0" anchor="t">
+            <a:spAutoFit/>
+          </a:bodyPr>
+          <a:lstStyle/>
+          <a:p>
+            <a:r>
+              <a:rPr lang="en-PH" sz="5400" dirty="0"/>
+              <a:t>Error Handling</a:t>
+            </a:r>
+            <a:endParaRPr lang="en-PH" sz="5400" b="1" dirty="0">
+              <a:effectLst/>
+            </a:endParaRPr>
+          </a:p>
+        </p:txBody>
+      </p:sp>
+      <p:pic>
+        <p:nvPicPr>
+          <p:cNvPr id="5" name="Picture 4">
+            <a:extLst>
+              <a:ext uri="{FF2B5EF4-FFF2-40B4-BE49-F238E27FC236}">
+                <a16:creationId xmlns:a16="http://schemas.microsoft.com/office/drawing/2014/main" id="{6946F076-1AC3-5E96-F8FE-C852F4A1C358}"/>
+              </a:ext>
+            </a:extLst>
+          </p:cNvPr>
+          <p:cNvPicPr>
+            <a:picLocks noChangeAspect="1"/>
+          </p:cNvPicPr>
+          <p:nvPr/>
+        </p:nvPicPr>
+        <p:blipFill>
+          <a:blip r:embed="rId3"/>
+          <a:stretch>
+            <a:fillRect/>
+          </a:stretch>
+        </p:blipFill>
+        <p:spPr>
+          <a:xfrm>
+            <a:off x="3352800" y="2316678"/>
+            <a:ext cx="9601200" cy="7375962"/>
+          </a:xfrm>
+          <a:prstGeom prst="rect">
+            <a:avLst/>
+          </a:prstGeom>
+        </p:spPr>
+      </p:pic>
+    </p:spTree>
+    <p:extLst>
+      <p:ext uri="{BB962C8B-B14F-4D97-AF65-F5344CB8AC3E}">
+        <p14:creationId xmlns:p14="http://schemas.microsoft.com/office/powerpoint/2010/main" val="1841659552"/>
+      </p:ext>
+    </p:extLst>
+  </p:cSld>
+  <p:clrMapOvr>
+    <a:masterClrMapping/>
+  </p:clrMapOvr>
+</p:sld>
+</file>
+
+<file path=ppt/slides/slide35.xml><?xml version="1.0" encoding="utf-8"?>
+<p:sld xmlns:a="http://schemas.openxmlformats.org/drawingml/2006/main" xmlns:r="http://schemas.openxmlformats.org/officeDocument/2006/relationships" xmlns:p="http://schemas.openxmlformats.org/presentationml/2006/main">
+  <p:cSld>
+    <p:spTree>
+      <p:nvGrpSpPr>
+        <p:cNvPr id="1" name="">
+          <a:extLst>
+            <a:ext uri="{FF2B5EF4-FFF2-40B4-BE49-F238E27FC236}">
+              <a16:creationId xmlns:a16="http://schemas.microsoft.com/office/drawing/2014/main" id="{C2776500-FDCE-6913-8650-167AB80B9062}"/>
+            </a:ext>
+          </a:extLst>
+        </p:cNvPr>
+        <p:cNvGrpSpPr/>
+        <p:nvPr/>
+      </p:nvGrpSpPr>
+      <p:grpSpPr>
+        <a:xfrm>
+          <a:off x="0" y="0"/>
+          <a:ext cx="0" cy="0"/>
+          <a:chOff x="0" y="0"/>
+          <a:chExt cx="0" cy="0"/>
+        </a:xfrm>
+      </p:grpSpPr>
+      <p:sp>
+        <p:nvSpPr>
+          <p:cNvPr id="4" name="TextBox 3">
+            <a:extLst>
+              <a:ext uri="{FF2B5EF4-FFF2-40B4-BE49-F238E27FC236}">
+                <a16:creationId xmlns:a16="http://schemas.microsoft.com/office/drawing/2014/main" id="{194EB38C-61AC-9355-B844-EBC38E2E17E5}"/>
+              </a:ext>
+            </a:extLst>
+          </p:cNvPr>
+          <p:cNvSpPr txBox="1"/>
+          <p:nvPr/>
+        </p:nvSpPr>
+        <p:spPr>
+          <a:xfrm>
+            <a:off x="7315200" y="571500"/>
+            <a:ext cx="11773748" cy="830997"/>
+          </a:xfrm>
+          <a:prstGeom prst="rect">
+            <a:avLst/>
+          </a:prstGeom>
+        </p:spPr>
+        <p:txBody>
+          <a:bodyPr lIns="0" tIns="0" rIns="0" bIns="0" rtlCol="0" anchor="t">
+            <a:spAutoFit/>
+          </a:bodyPr>
+          <a:lstStyle/>
+          <a:p>
+            <a:r>
+              <a:rPr lang="en-PH" sz="5400" dirty="0"/>
+              <a:t>Completion</a:t>
+            </a:r>
+            <a:endParaRPr lang="en-PH" sz="5400" b="1" dirty="0">
+              <a:effectLst/>
+            </a:endParaRPr>
+          </a:p>
+        </p:txBody>
+      </p:sp>
+      <p:pic>
+        <p:nvPicPr>
+          <p:cNvPr id="3" name="Picture 2">
+            <a:extLst>
+              <a:ext uri="{FF2B5EF4-FFF2-40B4-BE49-F238E27FC236}">
+                <a16:creationId xmlns:a16="http://schemas.microsoft.com/office/drawing/2014/main" id="{FEA02D64-D886-8FE8-AD80-433099D758BA}"/>
+              </a:ext>
+            </a:extLst>
+          </p:cNvPr>
+          <p:cNvPicPr>
+            <a:picLocks noChangeAspect="1"/>
+          </p:cNvPicPr>
+          <p:nvPr/>
+        </p:nvPicPr>
+        <p:blipFill>
+          <a:blip r:embed="rId3"/>
+          <a:stretch>
+            <a:fillRect/>
+          </a:stretch>
+        </p:blipFill>
+        <p:spPr>
+          <a:xfrm>
+            <a:off x="5791200" y="2552700"/>
+            <a:ext cx="6453386" cy="5503723"/>
+          </a:xfrm>
+          <a:prstGeom prst="rect">
+            <a:avLst/>
+          </a:prstGeom>
+        </p:spPr>
+      </p:pic>
+    </p:spTree>
+    <p:extLst>
+      <p:ext uri="{BB962C8B-B14F-4D97-AF65-F5344CB8AC3E}">
+        <p14:creationId xmlns:p14="http://schemas.microsoft.com/office/powerpoint/2010/main" val="1298650892"/>
+      </p:ext>
+    </p:extLst>
+  </p:cSld>
+  <p:clrMapOvr>
+    <a:masterClrMapping/>
+  </p:clrMapOvr>
+</p:sld>
+</file>
+
+<file path=ppt/slides/slide36.xml><?xml version="1.0" encoding="utf-8"?>
+<p:sld xmlns:a="http://schemas.openxmlformats.org/drawingml/2006/main" xmlns:r="http://schemas.openxmlformats.org/officeDocument/2006/relationships" xmlns:p="http://schemas.openxmlformats.org/presentationml/2006/main">
+  <p:cSld>
+    <p:spTree>
+      <p:nvGrpSpPr>
+        <p:cNvPr id="1" name="">
+          <a:extLst>
+            <a:ext uri="{FF2B5EF4-FFF2-40B4-BE49-F238E27FC236}">
+              <a16:creationId xmlns:a16="http://schemas.microsoft.com/office/drawing/2014/main" id="{79C669B5-3F6D-2CC5-A66C-BD7BBB61E5AE}"/>
+            </a:ext>
+          </a:extLst>
+        </p:cNvPr>
+        <p:cNvGrpSpPr/>
+        <p:nvPr/>
+      </p:nvGrpSpPr>
+      <p:grpSpPr>
+        <a:xfrm>
+          <a:off x="0" y="0"/>
+          <a:ext cx="0" cy="0"/>
+          <a:chOff x="0" y="0"/>
+          <a:chExt cx="0" cy="0"/>
+        </a:xfrm>
+      </p:grpSpPr>
+      <p:pic>
+        <p:nvPicPr>
+          <p:cNvPr id="8" name="Picture 7">
+            <a:extLst>
+              <a:ext uri="{FF2B5EF4-FFF2-40B4-BE49-F238E27FC236}">
+                <a16:creationId xmlns:a16="http://schemas.microsoft.com/office/drawing/2014/main" id="{6A1637D2-F64E-DAAE-683E-38DFEC9573E4}"/>
+              </a:ext>
+            </a:extLst>
+          </p:cNvPr>
+          <p:cNvPicPr>
+            <a:picLocks noChangeAspect="1"/>
+          </p:cNvPicPr>
+          <p:nvPr/>
+        </p:nvPicPr>
+        <p:blipFill>
+          <a:blip r:embed="rId3">
+            <a:extLst>
+              <a:ext uri="{28A0092B-C50C-407E-A947-70E740481C1C}">
+                <a14:useLocalDpi xmlns:a14="http://schemas.microsoft.com/office/drawing/2010/main" val="0"/>
+              </a:ext>
+            </a:extLst>
+          </a:blip>
+          <a:stretch>
+            <a:fillRect/>
+          </a:stretch>
+        </p:blipFill>
+        <p:spPr>
+          <a:xfrm>
+            <a:off x="3962400" y="647700"/>
+            <a:ext cx="9144000" cy="6912000"/>
+          </a:xfrm>
+          <a:prstGeom prst="rect">
+            <a:avLst/>
+          </a:prstGeom>
+        </p:spPr>
+      </p:pic>
+      <p:sp>
+        <p:nvSpPr>
+          <p:cNvPr id="9" name="TextBox 8">
+            <a:extLst>
+              <a:ext uri="{FF2B5EF4-FFF2-40B4-BE49-F238E27FC236}">
+                <a16:creationId xmlns:a16="http://schemas.microsoft.com/office/drawing/2014/main" id="{7FD301C9-1583-F2EE-A0CD-60B7C7718095}"/>
+              </a:ext>
+            </a:extLst>
+          </p:cNvPr>
+          <p:cNvSpPr txBox="1"/>
+          <p:nvPr/>
+        </p:nvSpPr>
+        <p:spPr>
+          <a:xfrm>
+            <a:off x="1752600" y="8496300"/>
+            <a:ext cx="15050348" cy="861774"/>
+          </a:xfrm>
+          <a:prstGeom prst="rect">
+            <a:avLst/>
+          </a:prstGeom>
+        </p:spPr>
+        <p:txBody>
+          <a:bodyPr wrap="square" lIns="0" tIns="0" rIns="0" bIns="0" rtlCol="0" anchor="t">
+            <a:spAutoFit/>
+          </a:bodyPr>
+          <a:lstStyle/>
+          <a:p>
+            <a:r>
+              <a:rPr lang="en-PH" sz="2800" dirty="0"/>
+              <a:t>App starts → Port reserved → Host server runs → Files discovered → Seeders resolved → Download job created → Workers fetch chunks → Errors handled → File completed.</a:t>
+            </a:r>
+            <a:endParaRPr lang="en-PH" sz="2800" b="1" dirty="0">
+              <a:effectLst/>
+            </a:endParaRPr>
+          </a:p>
+        </p:txBody>
+      </p:sp>
+    </p:spTree>
+    <p:extLst>
+      <p:ext uri="{BB962C8B-B14F-4D97-AF65-F5344CB8AC3E}">
+        <p14:creationId xmlns:p14="http://schemas.microsoft.com/office/powerpoint/2010/main" val="2889148711"/>
+      </p:ext>
+    </p:extLst>
   </p:cSld>
   <p:clrMapOvr>
     <a:masterClrMapping/>
@@ -12493,4 +16985,319 @@
   <a:objectDefaults/>
   <a:extraClrSchemeLst/>
 </a:theme>
+</file>
+
+<file path=ppt/theme/theme2.xml><?xml version="1.0" encoding="utf-8"?>
+<a:theme xmlns:a="http://schemas.openxmlformats.org/drawingml/2006/main" name="Office Theme">
+  <a:themeElements>
+    <a:clrScheme name="Office">
+      <a:dk1>
+        <a:sysClr val="windowText" lastClr="000000"/>
+      </a:dk1>
+      <a:lt1>
+        <a:sysClr val="window" lastClr="FFFFFF"/>
+      </a:lt1>
+      <a:dk2>
+        <a:srgbClr val="0E2841"/>
+      </a:dk2>
+      <a:lt2>
+        <a:srgbClr val="E8E8E8"/>
+      </a:lt2>
+      <a:accent1>
+        <a:srgbClr val="156082"/>
+      </a:accent1>
+      <a:accent2>
+        <a:srgbClr val="E97132"/>
+      </a:accent2>
+      <a:accent3>
+        <a:srgbClr val="196B24"/>
+      </a:accent3>
+      <a:accent4>
+        <a:srgbClr val="0F9ED5"/>
+      </a:accent4>
+      <a:accent5>
+        <a:srgbClr val="A02B93"/>
+      </a:accent5>
+      <a:accent6>
+        <a:srgbClr val="4EA72E"/>
+      </a:accent6>
+      <a:hlink>
+        <a:srgbClr val="467886"/>
+      </a:hlink>
+      <a:folHlink>
+        <a:srgbClr val="96607D"/>
+      </a:folHlink>
+    </a:clrScheme>
+    <a:fontScheme name="Office">
+      <a:majorFont>
+        <a:latin typeface="Aptos Display" panose="02110004020202020204"/>
+        <a:ea typeface=""/>
+        <a:cs typeface=""/>
+        <a:font script="Jpan" typeface="游ゴシック Light"/>
+        <a:font script="Hang" typeface="맑은 고딕"/>
+        <a:font script="Hans" typeface="等线 Light"/>
+        <a:font script="Hant" typeface="新細明體"/>
+        <a:font script="Arab" typeface="Times New Roman"/>
+        <a:font script="Hebr" typeface="Times New Roman"/>
+        <a:font script="Thai" typeface="Angsana New"/>
+        <a:font script="Ethi" typeface="Nyala"/>
+        <a:font script="Beng" typeface="Vrinda"/>
+        <a:font script="Gujr" typeface="Shruti"/>
+        <a:font script="Khmr" typeface="MoolBoran"/>
+        <a:font script="Knda" typeface="Tunga"/>
+        <a:font script="Guru" typeface="Raavi"/>
+        <a:font script="Cans" typeface="Euphemia"/>
+        <a:font script="Cher" typeface="Plantagenet Cherokee"/>
+        <a:font script="Yiii" typeface="Microsoft Yi Baiti"/>
+        <a:font script="Tibt" typeface="Microsoft Himalaya"/>
+        <a:font script="Thaa" typeface="MV Boli"/>
+        <a:font script="Deva" typeface="Mangal"/>
+        <a:font script="Telu" typeface="Gautami"/>
+        <a:font script="Taml" typeface="Latha"/>
+        <a:font script="Syrc" typeface="Estrangelo Edessa"/>
+        <a:font script="Orya" typeface="Kalinga"/>
+        <a:font script="Mlym" typeface="Kartika"/>
+        <a:font script="Laoo" typeface="DokChampa"/>
+        <a:font script="Sinh" typeface="Iskoola Pota"/>
+        <a:font script="Mong" typeface="Mongolian Baiti"/>
+        <a:font script="Viet" typeface="Times New Roman"/>
+        <a:font script="Uigh" typeface="Microsoft Uighur"/>
+        <a:font script="Geor" typeface="Sylfaen"/>
+        <a:font script="Armn" typeface="Arial"/>
+        <a:font script="Bugi" typeface="Leelawadee UI"/>
+        <a:font script="Bopo" typeface="Microsoft JhengHei"/>
+        <a:font script="Java" typeface="Javanese Text"/>
+        <a:font script="Lisu" typeface="Segoe UI"/>
+        <a:font script="Mymr" typeface="Myanmar Text"/>
+        <a:font script="Nkoo" typeface="Ebrima"/>
+        <a:font script="Olck" typeface="Nirmala UI"/>
+        <a:font script="Osma" typeface="Ebrima"/>
+        <a:font script="Phag" typeface="Phagspa"/>
+        <a:font script="Syrn" typeface="Estrangelo Edessa"/>
+        <a:font script="Syrj" typeface="Estrangelo Edessa"/>
+        <a:font script="Syre" typeface="Estrangelo Edessa"/>
+        <a:font script="Sora" typeface="Nirmala UI"/>
+        <a:font script="Tale" typeface="Microsoft Tai Le"/>
+        <a:font script="Talu" typeface="Microsoft New Tai Lue"/>
+        <a:font script="Tfng" typeface="Ebrima"/>
+      </a:majorFont>
+      <a:minorFont>
+        <a:latin typeface="Aptos" panose="02110004020202020204"/>
+        <a:ea typeface=""/>
+        <a:cs typeface=""/>
+        <a:font script="Jpan" typeface="游ゴシック"/>
+        <a:font script="Hang" typeface="맑은 고딕"/>
+        <a:font script="Hans" typeface="等线"/>
+        <a:font script="Hant" typeface="新細明體"/>
+        <a:font script="Arab" typeface="Arial"/>
+        <a:font script="Hebr" typeface="Arial"/>
+        <a:font script="Thai" typeface="Cordia New"/>
+        <a:font script="Ethi" typeface="Nyala"/>
+        <a:font script="Beng" typeface="Vrinda"/>
+        <a:font script="Gujr" typeface="Shruti"/>
+        <a:font script="Khmr" typeface="DaunPenh"/>
+        <a:font script="Knda" typeface="Tunga"/>
+        <a:font script="Guru" typeface="Raavi"/>
+        <a:font script="Cans" typeface="Euphemia"/>
+        <a:font script="Cher" typeface="Plantagenet Cherokee"/>
+        <a:font script="Yiii" typeface="Microsoft Yi Baiti"/>
+        <a:font script="Tibt" typeface="Microsoft Himalaya"/>
+        <a:font script="Thaa" typeface="MV Boli"/>
+        <a:font script="Deva" typeface="Mangal"/>
+        <a:font script="Telu" typeface="Gautami"/>
+        <a:font script="Taml" typeface="Latha"/>
+        <a:font script="Syrc" typeface="Estrangelo Edessa"/>
+        <a:font script="Orya" typeface="Kalinga"/>
+        <a:font script="Mlym" typeface="Kartika"/>
+        <a:font script="Laoo" typeface="DokChampa"/>
+        <a:font script="Sinh" typeface="Iskoola Pota"/>
+        <a:font script="Mong" typeface="Mongolian Baiti"/>
+        <a:font script="Viet" typeface="Arial"/>
+        <a:font script="Uigh" typeface="Microsoft Uighur"/>
+        <a:font script="Geor" typeface="Sylfaen"/>
+        <a:font script="Armn" typeface="Arial"/>
+        <a:font script="Bugi" typeface="Leelawadee UI"/>
+        <a:font script="Bopo" typeface="Microsoft JhengHei"/>
+        <a:font script="Java" typeface="Javanese Text"/>
+        <a:font script="Lisu" typeface="Segoe UI"/>
+        <a:font script="Mymr" typeface="Myanmar Text"/>
+        <a:font script="Nkoo" typeface="Ebrima"/>
+        <a:font script="Olck" typeface="Nirmala UI"/>
+        <a:font script="Osma" typeface="Ebrima"/>
+        <a:font script="Phag" typeface="Phagspa"/>
+        <a:font script="Syrn" typeface="Estrangelo Edessa"/>
+        <a:font script="Syrj" typeface="Estrangelo Edessa"/>
+        <a:font script="Syre" typeface="Estrangelo Edessa"/>
+        <a:font script="Sora" typeface="Nirmala UI"/>
+        <a:font script="Tale" typeface="Microsoft Tai Le"/>
+        <a:font script="Talu" typeface="Microsoft New Tai Lue"/>
+        <a:font script="Tfng" typeface="Ebrima"/>
+      </a:minorFont>
+    </a:fontScheme>
+    <a:fmtScheme name="Office">
+      <a:fillStyleLst>
+        <a:solidFill>
+          <a:schemeClr val="phClr"/>
+        </a:solidFill>
+        <a:gradFill rotWithShape="1">
+          <a:gsLst>
+            <a:gs pos="0">
+              <a:schemeClr val="phClr">
+                <a:lumMod val="110000"/>
+                <a:satMod val="105000"/>
+                <a:tint val="67000"/>
+              </a:schemeClr>
+            </a:gs>
+            <a:gs pos="50000">
+              <a:schemeClr val="phClr">
+                <a:lumMod val="105000"/>
+                <a:satMod val="103000"/>
+                <a:tint val="73000"/>
+              </a:schemeClr>
+            </a:gs>
+            <a:gs pos="100000">
+              <a:schemeClr val="phClr">
+                <a:lumMod val="105000"/>
+                <a:satMod val="109000"/>
+                <a:tint val="81000"/>
+              </a:schemeClr>
+            </a:gs>
+          </a:gsLst>
+          <a:lin ang="5400000" scaled="0"/>
+        </a:gradFill>
+        <a:gradFill rotWithShape="1">
+          <a:gsLst>
+            <a:gs pos="0">
+              <a:schemeClr val="phClr">
+                <a:satMod val="103000"/>
+                <a:lumMod val="102000"/>
+                <a:tint val="94000"/>
+              </a:schemeClr>
+            </a:gs>
+            <a:gs pos="50000">
+              <a:schemeClr val="phClr">
+                <a:satMod val="110000"/>
+                <a:lumMod val="100000"/>
+                <a:shade val="100000"/>
+              </a:schemeClr>
+            </a:gs>
+            <a:gs pos="100000">
+              <a:schemeClr val="phClr">
+                <a:lumMod val="99000"/>
+                <a:satMod val="120000"/>
+                <a:shade val="78000"/>
+              </a:schemeClr>
+            </a:gs>
+          </a:gsLst>
+          <a:lin ang="5400000" scaled="0"/>
+        </a:gradFill>
+      </a:fillStyleLst>
+      <a:lnStyleLst>
+        <a:ln w="12700" cap="flat" cmpd="sng" algn="ctr">
+          <a:solidFill>
+            <a:schemeClr val="phClr"/>
+          </a:solidFill>
+          <a:prstDash val="solid"/>
+          <a:miter lim="800000"/>
+        </a:ln>
+        <a:ln w="19050" cap="flat" cmpd="sng" algn="ctr">
+          <a:solidFill>
+            <a:schemeClr val="phClr"/>
+          </a:solidFill>
+          <a:prstDash val="solid"/>
+          <a:miter lim="800000"/>
+        </a:ln>
+        <a:ln w="25400" cap="flat" cmpd="sng" algn="ctr">
+          <a:solidFill>
+            <a:schemeClr val="phClr"/>
+          </a:solidFill>
+          <a:prstDash val="solid"/>
+          <a:miter lim="800000"/>
+        </a:ln>
+      </a:lnStyleLst>
+      <a:effectStyleLst>
+        <a:effectStyle>
+          <a:effectLst/>
+        </a:effectStyle>
+        <a:effectStyle>
+          <a:effectLst/>
+        </a:effectStyle>
+        <a:effectStyle>
+          <a:effectLst>
+            <a:outerShdw blurRad="57150" dist="19050" dir="5400000" algn="ctr" rotWithShape="0">
+              <a:srgbClr val="000000">
+                <a:alpha val="63000"/>
+              </a:srgbClr>
+            </a:outerShdw>
+          </a:effectLst>
+        </a:effectStyle>
+      </a:effectStyleLst>
+      <a:bgFillStyleLst>
+        <a:solidFill>
+          <a:schemeClr val="phClr"/>
+        </a:solidFill>
+        <a:solidFill>
+          <a:schemeClr val="phClr">
+            <a:tint val="95000"/>
+            <a:satMod val="170000"/>
+          </a:schemeClr>
+        </a:solidFill>
+        <a:gradFill rotWithShape="1">
+          <a:gsLst>
+            <a:gs pos="0">
+              <a:schemeClr val="phClr">
+                <a:tint val="93000"/>
+                <a:satMod val="150000"/>
+                <a:shade val="98000"/>
+                <a:lumMod val="102000"/>
+              </a:schemeClr>
+            </a:gs>
+            <a:gs pos="50000">
+              <a:schemeClr val="phClr">
+                <a:tint val="98000"/>
+                <a:satMod val="130000"/>
+                <a:shade val="90000"/>
+                <a:lumMod val="103000"/>
+              </a:schemeClr>
+            </a:gs>
+            <a:gs pos="100000">
+              <a:schemeClr val="phClr">
+                <a:shade val="63000"/>
+                <a:satMod val="120000"/>
+              </a:schemeClr>
+            </a:gs>
+          </a:gsLst>
+          <a:lin ang="5400000" scaled="0"/>
+        </a:gradFill>
+      </a:bgFillStyleLst>
+    </a:fmtScheme>
+  </a:themeElements>
+  <a:objectDefaults>
+    <a:lnDef>
+      <a:spPr/>
+      <a:bodyPr/>
+      <a:lstStyle/>
+      <a:style>
+        <a:lnRef idx="2">
+          <a:schemeClr val="accent1"/>
+        </a:lnRef>
+        <a:fillRef idx="0">
+          <a:schemeClr val="accent1"/>
+        </a:fillRef>
+        <a:effectRef idx="1">
+          <a:schemeClr val="accent1"/>
+        </a:effectRef>
+        <a:fontRef idx="minor">
+          <a:schemeClr val="tx1"/>
+        </a:fontRef>
+      </a:style>
+    </a:lnDef>
+  </a:objectDefaults>
+  <a:extraClrSchemeLst/>
+  <a:extLst>
+    <a:ext uri="{05A4C25C-085E-4340-85A3-A5531E510DB2}">
+      <thm15:themeFamily xmlns:thm15="http://schemas.microsoft.com/office/thememl/2012/main" name="Office Theme" id="{2E142A2C-CD16-42D6-873A-C26D2A0506FA}" vid="{1BDDFF52-6CD6-40A5-AB3C-68EB2F1E4D0A}"/>
+    </a:ext>
+  </a:extLst>
+</a:theme>
 </file>